--- a/2026-Q4/Devotionals/TheObedienceOfFaith.pptx
+++ b/2026-Q4/Devotionals/TheObedienceOfFaith.pptx
@@ -10,8 +10,8 @@
   <p:sldIdLst>
     <p:sldId id="256" r:id="rId2"/>
     <p:sldId id="266" r:id="rId3"/>
-    <p:sldId id="269" r:id="rId4"/>
-    <p:sldId id="637" r:id="rId5"/>
+    <p:sldId id="637" r:id="rId4"/>
+    <p:sldId id="269" r:id="rId5"/>
     <p:sldId id="268" r:id="rId6"/>
     <p:sldId id="265" r:id="rId7"/>
   </p:sldIdLst>
@@ -475,7 +475,7 @@
           <a:p>
             <a:fld id="{F7021451-1387-4CA6-816F-3879F97B5CBC}" type="slidenum">
               <a:rPr lang="en-US"/>
-              <a:t>3</a:t>
+              <a:t>4</a:t>
             </a:fld>
             <a:endParaRPr lang="en-US"/>
           </a:p>
@@ -2243,1638 +2243,6 @@
 <file path=ppt/slides/slide3.xml><?xml version="1.0" encoding="utf-8"?>
 <p:sld xmlns:a="http://schemas.openxmlformats.org/drawingml/2006/main" xmlns:r="http://schemas.openxmlformats.org/officeDocument/2006/relationships" xmlns:p="http://schemas.openxmlformats.org/presentationml/2006/main">
   <p:cSld>
-    <p:spTree>
-      <p:nvGrpSpPr>
-        <p:cNvPr id="1" name=""/>
-        <p:cNvGrpSpPr/>
-        <p:nvPr/>
-      </p:nvGrpSpPr>
-      <p:grpSpPr>
-        <a:xfrm>
-          <a:off x="0" y="0"/>
-          <a:ext cx="0" cy="0"/>
-          <a:chOff x="0" y="0"/>
-          <a:chExt cx="0" cy="0"/>
-        </a:xfrm>
-      </p:grpSpPr>
-      <p:sp>
-        <p:nvSpPr>
-          <p:cNvPr id="2" name="HeadTitle"/>
-          <p:cNvSpPr txBox="1"/>
-          <p:nvPr/>
-        </p:nvSpPr>
-        <p:spPr>
-          <a:xfrm>
-            <a:off x="228600" y="109728"/>
-            <a:ext cx="8686800" cy="502920"/>
-          </a:xfrm>
-          <a:prstGeom prst="rect">
-            <a:avLst/>
-          </a:prstGeom>
-          <a:noFill/>
-          <a:ln/>
-        </p:spPr>
-        <p:txBody>
-          <a:bodyPr wrap="square" lIns="0" tIns="0" rIns="0" bIns="0" rtlCol="0" anchor="t"/>
-          <a:lstStyle/>
-          <a:p>
-            <a:pPr marL="0" indent="0" algn="l">
-              <a:buNone/>
-            </a:pPr>
-            <a:r>
-              <a:rPr lang="en-US" sz="2600" b="1" dirty="0">
-                <a:solidFill>
-                  <a:srgbClr val="1F497D"/>
-                </a:solidFill>
-                <a:latin typeface="Arial" pitchFamily="34" charset="0"/>
-                <a:ea typeface="Arial" pitchFamily="34" charset="-122"/>
-                <a:cs typeface="Arial" pitchFamily="34" charset="-120"/>
-              </a:rPr>
-              <a:t>Four Concepts that Scripture Uses with Precision</a:t>
-            </a:r>
-            <a:endParaRPr lang="en-US" sz="1600" dirty="0"/>
-          </a:p>
-        </p:txBody>
-      </p:sp>
-      <p:sp>
-        <p:nvSpPr>
-          <p:cNvPr id="4" name="L1box"/>
-          <p:cNvSpPr/>
-          <p:nvPr/>
-        </p:nvSpPr>
-        <p:spPr>
-          <a:xfrm>
-            <a:off x="457200" y="4750829"/>
-            <a:ext cx="3200400" cy="1024128"/>
-          </a:xfrm>
-          <a:prstGeom prst="roundRect">
-            <a:avLst>
-              <a:gd name="adj" fmla="val 7143"/>
-            </a:avLst>
-          </a:prstGeom>
-          <a:solidFill>
-            <a:srgbClr val="1F497D"/>
-          </a:solidFill>
-          <a:ln w="12700">
-            <a:solidFill>
-              <a:srgbClr val="1F497D"/>
-            </a:solidFill>
-            <a:prstDash val="solid"/>
-          </a:ln>
-        </p:spPr>
-        <p:txBody>
-          <a:bodyPr/>
-          <a:lstStyle/>
-          <a:p>
-            <a:endParaRPr lang="en-US"/>
-          </a:p>
-        </p:txBody>
-      </p:sp>
-      <p:sp>
-        <p:nvSpPr>
-          <p:cNvPr id="5" name="L1lbl"/>
-          <p:cNvSpPr txBox="1"/>
-          <p:nvPr/>
-        </p:nvSpPr>
-        <p:spPr>
-          <a:xfrm>
-            <a:off x="457200" y="4869701"/>
-            <a:ext cx="3200400" cy="822960"/>
-          </a:xfrm>
-          <a:prstGeom prst="rect">
-            <a:avLst/>
-          </a:prstGeom>
-          <a:noFill/>
-          <a:ln/>
-        </p:spPr>
-        <p:txBody>
-          <a:bodyPr wrap="square" lIns="0" tIns="0" rIns="0" bIns="0" rtlCol="0" anchor="t"/>
-          <a:lstStyle/>
-          <a:p>
-            <a:pPr marL="0" indent="0" algn="ctr">
-              <a:buNone/>
-            </a:pPr>
-            <a:r>
-              <a:rPr lang="en-US" sz="2000" b="1" dirty="0">
-                <a:solidFill>
-                  <a:srgbClr val="FFFFFF"/>
-                </a:solidFill>
-                <a:latin typeface="Arial" pitchFamily="34" charset="0"/>
-                <a:ea typeface="Arial" pitchFamily="34" charset="-122"/>
-                <a:cs typeface="Arial" pitchFamily="34" charset="-120"/>
-              </a:rPr>
-              <a:t>1. Religion</a:t>
-            </a:r>
-            <a:endParaRPr lang="en-US" dirty="0"/>
-          </a:p>
-          <a:p>
-            <a:pPr marL="0" indent="0" algn="ctr">
-              <a:buNone/>
-            </a:pPr>
-            <a:r>
-              <a:rPr lang="en-US" sz="2000" dirty="0">
-                <a:solidFill>
-                  <a:srgbClr val="FFFFFF"/>
-                </a:solidFill>
-                <a:latin typeface="Arial" pitchFamily="34" charset="0"/>
-                <a:ea typeface="Arial" pitchFamily="34" charset="-122"/>
-                <a:cs typeface="Arial" pitchFamily="34" charset="-120"/>
-              </a:rPr>
-              <a:t>the FORM </a:t>
-            </a:r>
-            <a:r>
-              <a:rPr lang="en-US" sz="2000" dirty="0">
-                <a:solidFill>
-                  <a:srgbClr val="FFFFFF"/>
-                </a:solidFill>
-                <a:latin typeface="Arial" pitchFamily="34" charset="0"/>
-                <a:ea typeface="Arial" pitchFamily="34" charset="-122"/>
-                <a:cs typeface="Arial" pitchFamily="34" charset="-120"/>
-                <a:sym typeface="Wingdings" pitchFamily="2" charset="2"/>
-              </a:rPr>
-              <a:t></a:t>
-            </a:r>
-            <a:r>
-              <a:rPr lang="en-US" sz="2000" dirty="0">
-                <a:solidFill>
-                  <a:srgbClr val="FFFFFF"/>
-                </a:solidFill>
-                <a:latin typeface="Arial" pitchFamily="34" charset="0"/>
-                <a:ea typeface="Arial" pitchFamily="34" charset="-122"/>
-                <a:cs typeface="Arial" pitchFamily="34" charset="-120"/>
-              </a:rPr>
-              <a:t> observance, attendance, identity</a:t>
-            </a:r>
-            <a:endParaRPr lang="en-US" sz="2000" dirty="0"/>
-          </a:p>
-        </p:txBody>
-      </p:sp>
-      <p:sp>
-        <p:nvSpPr>
-          <p:cNvPr id="6" name="L1txt"/>
-          <p:cNvSpPr txBox="1"/>
-          <p:nvPr/>
-        </p:nvSpPr>
-        <p:spPr>
-          <a:xfrm>
-            <a:off x="3931920" y="4769117"/>
-            <a:ext cx="4983480" cy="1051560"/>
-          </a:xfrm>
-          <a:prstGeom prst="rect">
-            <a:avLst/>
-          </a:prstGeom>
-          <a:noFill/>
-          <a:ln/>
-        </p:spPr>
-        <p:txBody>
-          <a:bodyPr wrap="square" lIns="0" tIns="0" rIns="0" bIns="0" rtlCol="0" anchor="ctr"/>
-          <a:lstStyle/>
-          <a:p>
-            <a:pPr marL="0" indent="0" algn="l">
-              <a:buNone/>
-            </a:pPr>
-            <a:r>
-              <a:rPr lang="en-US" sz="2000" b="1" dirty="0">
-                <a:solidFill>
-                  <a:srgbClr val="1F497D"/>
-                </a:solidFill>
-                <a:latin typeface="Arial" pitchFamily="34" charset="0"/>
-                <a:ea typeface="Arial" pitchFamily="34" charset="-122"/>
-                <a:cs typeface="Arial" pitchFamily="34" charset="-120"/>
-              </a:rPr>
-              <a:t>Religion: </a:t>
-            </a:r>
-            <a:r>
-              <a:rPr lang="en-US" sz="2000" dirty="0">
-                <a:solidFill>
-                  <a:srgbClr val="000000"/>
-                </a:solidFill>
-                <a:latin typeface="Arial" pitchFamily="34" charset="0"/>
-                <a:ea typeface="Arial" pitchFamily="34" charset="-122"/>
-                <a:cs typeface="Arial" pitchFamily="34" charset="-120"/>
-              </a:rPr>
-              <a:t>James says a man can practice the form; deceive his heart </a:t>
-            </a:r>
-            <a:r>
-              <a:rPr lang="en-US" sz="2000" dirty="0">
-                <a:solidFill>
-                  <a:srgbClr val="000000"/>
-                </a:solidFill>
-                <a:latin typeface="Arial" pitchFamily="34" charset="0"/>
-                <a:ea typeface="Arial" pitchFamily="34" charset="-122"/>
-                <a:cs typeface="Arial" pitchFamily="34" charset="-120"/>
-                <a:sym typeface="Wingdings" pitchFamily="2" charset="2"/>
-              </a:rPr>
-              <a:t></a:t>
-            </a:r>
-            <a:r>
-              <a:rPr lang="en-US" sz="2000" dirty="0">
-                <a:solidFill>
-                  <a:srgbClr val="000000"/>
-                </a:solidFill>
-                <a:latin typeface="Arial" pitchFamily="34" charset="0"/>
-                <a:ea typeface="Arial" pitchFamily="34" charset="-122"/>
-                <a:cs typeface="Arial" pitchFamily="34" charset="-120"/>
-              </a:rPr>
-              <a:t> </a:t>
-            </a:r>
-            <a:r>
-              <a:rPr lang="en-US" sz="2000" i="1" dirty="0">
-                <a:solidFill>
-                  <a:srgbClr val="000000"/>
-                </a:solidFill>
-                <a:latin typeface="Arial" pitchFamily="34" charset="0"/>
-                <a:ea typeface="Arial" pitchFamily="34" charset="-122"/>
-                <a:cs typeface="Arial" pitchFamily="34" charset="-120"/>
-              </a:rPr>
-              <a:t>“futile” </a:t>
-            </a:r>
-          </a:p>
-          <a:p>
-            <a:pPr marL="0" indent="0" algn="l">
-              <a:buNone/>
-            </a:pPr>
-            <a:r>
-              <a:rPr lang="en-US" sz="2000" dirty="0">
-                <a:solidFill>
-                  <a:srgbClr val="000000"/>
-                </a:solidFill>
-                <a:latin typeface="Arial" pitchFamily="34" charset="0"/>
-                <a:ea typeface="Arial" pitchFamily="34" charset="-122"/>
-                <a:cs typeface="Arial" pitchFamily="34" charset="-120"/>
-              </a:rPr>
-              <a:t>(James 1:26).   Alone, it proves nothing.</a:t>
-            </a:r>
-            <a:endParaRPr lang="en-US" sz="2000" dirty="0"/>
-          </a:p>
-        </p:txBody>
-      </p:sp>
-      <p:sp>
-        <p:nvSpPr>
-          <p:cNvPr id="7" name="L2box"/>
-          <p:cNvSpPr/>
-          <p:nvPr/>
-        </p:nvSpPr>
-        <p:spPr>
-          <a:xfrm>
-            <a:off x="457200" y="3580397"/>
-            <a:ext cx="3200400" cy="1024128"/>
-          </a:xfrm>
-          <a:prstGeom prst="roundRect">
-            <a:avLst>
-              <a:gd name="adj" fmla="val 7143"/>
-            </a:avLst>
-          </a:prstGeom>
-          <a:solidFill>
-            <a:srgbClr val="1F497D"/>
-          </a:solidFill>
-          <a:ln w="12700">
-            <a:solidFill>
-              <a:srgbClr val="1F497D"/>
-            </a:solidFill>
-            <a:prstDash val="solid"/>
-          </a:ln>
-        </p:spPr>
-        <p:txBody>
-          <a:bodyPr/>
-          <a:lstStyle/>
-          <a:p>
-            <a:endParaRPr lang="en-US"/>
-          </a:p>
-        </p:txBody>
-      </p:sp>
-      <p:sp>
-        <p:nvSpPr>
-          <p:cNvPr id="8" name="L2lbl"/>
-          <p:cNvSpPr txBox="1"/>
-          <p:nvPr/>
-        </p:nvSpPr>
-        <p:spPr>
-          <a:xfrm>
-            <a:off x="457200" y="3699269"/>
-            <a:ext cx="3200400" cy="822960"/>
-          </a:xfrm>
-          <a:prstGeom prst="rect">
-            <a:avLst/>
-          </a:prstGeom>
-          <a:noFill/>
-          <a:ln/>
-        </p:spPr>
-        <p:txBody>
-          <a:bodyPr wrap="square" lIns="0" tIns="0" rIns="0" bIns="0" rtlCol="0" anchor="t"/>
-          <a:lstStyle/>
-          <a:p>
-            <a:pPr marL="0" indent="0" algn="ctr">
-              <a:buNone/>
-            </a:pPr>
-            <a:r>
-              <a:rPr lang="en-US" sz="2000" b="1" dirty="0">
-                <a:solidFill>
-                  <a:srgbClr val="FFFFFF"/>
-                </a:solidFill>
-                <a:latin typeface="Arial" pitchFamily="34" charset="0"/>
-                <a:ea typeface="Arial" pitchFamily="34" charset="-122"/>
-                <a:cs typeface="Arial" pitchFamily="34" charset="-120"/>
-              </a:rPr>
-              <a:t>2. Worship</a:t>
-            </a:r>
-            <a:endParaRPr lang="en-US" dirty="0"/>
-          </a:p>
-          <a:p>
-            <a:pPr marL="0" indent="0" algn="ctr">
-              <a:buNone/>
-            </a:pPr>
-            <a:r>
-              <a:rPr lang="en-US" sz="2000" dirty="0">
-                <a:solidFill>
-                  <a:srgbClr val="FFFFFF"/>
-                </a:solidFill>
-                <a:latin typeface="Arial" pitchFamily="34" charset="0"/>
-                <a:ea typeface="Arial" pitchFamily="34" charset="-122"/>
-                <a:cs typeface="Arial" pitchFamily="34" charset="-120"/>
-              </a:rPr>
-              <a:t>the DISPOSITION </a:t>
-            </a:r>
-            <a:r>
-              <a:rPr lang="en-US" sz="2000" dirty="0">
-                <a:solidFill>
-                  <a:srgbClr val="FFFFFF"/>
-                </a:solidFill>
-                <a:latin typeface="Arial" pitchFamily="34" charset="0"/>
-                <a:ea typeface="Arial" pitchFamily="34" charset="-122"/>
-                <a:cs typeface="Arial" pitchFamily="34" charset="-120"/>
-                <a:sym typeface="Wingdings" pitchFamily="2" charset="2"/>
-              </a:rPr>
-              <a:t></a:t>
-            </a:r>
-            <a:r>
-              <a:rPr lang="en-US" sz="2000" dirty="0">
-                <a:solidFill>
-                  <a:srgbClr val="FFFFFF"/>
-                </a:solidFill>
-                <a:latin typeface="Arial" pitchFamily="34" charset="0"/>
-                <a:ea typeface="Arial" pitchFamily="34" charset="-122"/>
-                <a:cs typeface="Arial" pitchFamily="34" charset="-120"/>
-              </a:rPr>
-              <a:t> the heart aimed at God</a:t>
-            </a:r>
-            <a:endParaRPr lang="en-US" sz="2000" dirty="0"/>
-          </a:p>
-        </p:txBody>
-      </p:sp>
-      <p:sp>
-        <p:nvSpPr>
-          <p:cNvPr id="9" name="L2txt"/>
-          <p:cNvSpPr txBox="1"/>
-          <p:nvPr/>
-        </p:nvSpPr>
-        <p:spPr>
-          <a:xfrm>
-            <a:off x="3931920" y="3598685"/>
-            <a:ext cx="4983480" cy="1051560"/>
-          </a:xfrm>
-          <a:prstGeom prst="rect">
-            <a:avLst/>
-          </a:prstGeom>
-          <a:noFill/>
-          <a:ln/>
-        </p:spPr>
-        <p:txBody>
-          <a:bodyPr wrap="square" lIns="0" tIns="0" rIns="0" bIns="0" rtlCol="0" anchor="ctr"/>
-          <a:lstStyle/>
-          <a:p>
-            <a:pPr marL="0" indent="0" algn="l">
-              <a:buNone/>
-            </a:pPr>
-            <a:r>
-              <a:rPr lang="en-US" sz="2000" b="1" dirty="0">
-                <a:solidFill>
-                  <a:srgbClr val="1F497D"/>
-                </a:solidFill>
-                <a:latin typeface="Arial" pitchFamily="34" charset="0"/>
-                <a:ea typeface="Arial" pitchFamily="34" charset="-122"/>
-                <a:cs typeface="Arial" pitchFamily="34" charset="-120"/>
-              </a:rPr>
-              <a:t>Worship: </a:t>
-            </a:r>
-            <a:r>
-              <a:rPr lang="en-US" sz="2000" i="1" dirty="0">
-                <a:solidFill>
-                  <a:srgbClr val="000000"/>
-                </a:solidFill>
-                <a:latin typeface="Arial" pitchFamily="34" charset="0"/>
-                <a:ea typeface="Arial" pitchFamily="34" charset="-122"/>
-                <a:cs typeface="Arial" pitchFamily="34" charset="-120"/>
-              </a:rPr>
-              <a:t>“In spirit and truth”</a:t>
-            </a:r>
-            <a:r>
-              <a:rPr lang="en-US" sz="2000" dirty="0">
-                <a:solidFill>
-                  <a:srgbClr val="000000"/>
-                </a:solidFill>
-                <a:latin typeface="Arial" pitchFamily="34" charset="0"/>
-                <a:ea typeface="Arial" pitchFamily="34" charset="-122"/>
-                <a:cs typeface="Arial" pitchFamily="34" charset="-120"/>
-              </a:rPr>
-              <a:t> (John 4:23–24). But a disposition is invisible </a:t>
-            </a:r>
-            <a:r>
-              <a:rPr lang="en-US" sz="2000" dirty="0">
-                <a:solidFill>
-                  <a:srgbClr val="000000"/>
-                </a:solidFill>
-                <a:latin typeface="Arial" pitchFamily="34" charset="0"/>
-                <a:ea typeface="Arial" pitchFamily="34" charset="-122"/>
-                <a:cs typeface="Arial" pitchFamily="34" charset="-120"/>
-                <a:sym typeface="Wingdings" pitchFamily="2" charset="2"/>
-              </a:rPr>
-              <a:t></a:t>
-            </a:r>
-            <a:r>
-              <a:rPr lang="en-US" sz="2000" dirty="0">
-                <a:solidFill>
-                  <a:srgbClr val="000000"/>
-                </a:solidFill>
-                <a:latin typeface="Arial" pitchFamily="34" charset="0"/>
-                <a:ea typeface="Arial" pitchFamily="34" charset="-122"/>
-                <a:cs typeface="Arial" pitchFamily="34" charset="-120"/>
-              </a:rPr>
-              <a:t> even to its owner.</a:t>
-            </a:r>
-            <a:endParaRPr lang="en-US" sz="2000" dirty="0"/>
-          </a:p>
-        </p:txBody>
-      </p:sp>
-      <p:sp>
-        <p:nvSpPr>
-          <p:cNvPr id="10" name="L3box"/>
-          <p:cNvSpPr/>
-          <p:nvPr/>
-        </p:nvSpPr>
-        <p:spPr>
-          <a:xfrm>
-            <a:off x="457200" y="2409965"/>
-            <a:ext cx="3200400" cy="1024128"/>
-          </a:xfrm>
-          <a:prstGeom prst="roundRect">
-            <a:avLst>
-              <a:gd name="adj" fmla="val 7143"/>
-            </a:avLst>
-          </a:prstGeom>
-          <a:solidFill>
-            <a:srgbClr val="1F497D"/>
-          </a:solidFill>
-          <a:ln w="12700">
-            <a:solidFill>
-              <a:srgbClr val="1F497D"/>
-            </a:solidFill>
-            <a:prstDash val="solid"/>
-          </a:ln>
-        </p:spPr>
-        <p:txBody>
-          <a:bodyPr/>
-          <a:lstStyle/>
-          <a:p>
-            <a:endParaRPr lang="en-US"/>
-          </a:p>
-        </p:txBody>
-      </p:sp>
-      <p:sp>
-        <p:nvSpPr>
-          <p:cNvPr id="11" name="L3lbl"/>
-          <p:cNvSpPr txBox="1"/>
-          <p:nvPr/>
-        </p:nvSpPr>
-        <p:spPr>
-          <a:xfrm>
-            <a:off x="457200" y="2528837"/>
-            <a:ext cx="3200400" cy="822960"/>
-          </a:xfrm>
-          <a:prstGeom prst="rect">
-            <a:avLst/>
-          </a:prstGeom>
-          <a:noFill/>
-          <a:ln/>
-        </p:spPr>
-        <p:txBody>
-          <a:bodyPr wrap="square" lIns="0" tIns="0" rIns="0" bIns="0" rtlCol="0" anchor="t"/>
-          <a:lstStyle/>
-          <a:p>
-            <a:pPr marL="0" indent="0" algn="ctr">
-              <a:buNone/>
-            </a:pPr>
-            <a:r>
-              <a:rPr lang="en-US" sz="2000" b="1" dirty="0">
-                <a:solidFill>
-                  <a:srgbClr val="FFFFFF"/>
-                </a:solidFill>
-                <a:latin typeface="Arial" pitchFamily="34" charset="0"/>
-                <a:ea typeface="Arial" pitchFamily="34" charset="-122"/>
-                <a:cs typeface="Arial" pitchFamily="34" charset="-120"/>
-              </a:rPr>
-              <a:t>3. Sacrifice</a:t>
-            </a:r>
-            <a:endParaRPr lang="en-US" dirty="0"/>
-          </a:p>
-          <a:p>
-            <a:pPr marL="0" indent="0" algn="ctr">
-              <a:buNone/>
-            </a:pPr>
-            <a:r>
-              <a:rPr lang="en-US" sz="2000" dirty="0">
-                <a:solidFill>
-                  <a:srgbClr val="FFFFFF"/>
-                </a:solidFill>
-                <a:latin typeface="Arial" pitchFamily="34" charset="0"/>
-                <a:ea typeface="Arial" pitchFamily="34" charset="-122"/>
-                <a:cs typeface="Arial" pitchFamily="34" charset="-120"/>
-              </a:rPr>
-              <a:t>the COST </a:t>
-            </a:r>
-            <a:r>
-              <a:rPr lang="en-US" sz="2000" dirty="0">
-                <a:solidFill>
-                  <a:srgbClr val="FFFFFF"/>
-                </a:solidFill>
-                <a:latin typeface="Arial" pitchFamily="34" charset="0"/>
-                <a:ea typeface="Arial" pitchFamily="34" charset="-122"/>
-                <a:cs typeface="Arial" pitchFamily="34" charset="-120"/>
-                <a:sym typeface="Wingdings" pitchFamily="2" charset="2"/>
-              </a:rPr>
-              <a:t></a:t>
-            </a:r>
-            <a:r>
-              <a:rPr lang="en-US" sz="2000" dirty="0">
-                <a:solidFill>
-                  <a:srgbClr val="FFFFFF"/>
-                </a:solidFill>
-                <a:latin typeface="Arial" pitchFamily="34" charset="0"/>
-                <a:ea typeface="Arial" pitchFamily="34" charset="-122"/>
-                <a:cs typeface="Arial" pitchFamily="34" charset="-120"/>
-              </a:rPr>
-              <a:t> the disposition made visible</a:t>
-            </a:r>
-            <a:endParaRPr lang="en-US" sz="2000" dirty="0"/>
-          </a:p>
-        </p:txBody>
-      </p:sp>
-      <p:sp>
-        <p:nvSpPr>
-          <p:cNvPr id="12" name="L3txt"/>
-          <p:cNvSpPr txBox="1"/>
-          <p:nvPr/>
-        </p:nvSpPr>
-        <p:spPr>
-          <a:xfrm>
-            <a:off x="3931920" y="2428253"/>
-            <a:ext cx="4983480" cy="1051560"/>
-          </a:xfrm>
-          <a:prstGeom prst="rect">
-            <a:avLst/>
-          </a:prstGeom>
-          <a:noFill/>
-          <a:ln/>
-        </p:spPr>
-        <p:txBody>
-          <a:bodyPr wrap="square" lIns="0" tIns="0" rIns="0" bIns="0" rtlCol="0" anchor="ctr"/>
-          <a:lstStyle/>
-          <a:p>
-            <a:pPr marL="0" indent="0" algn="l">
-              <a:buNone/>
-            </a:pPr>
-            <a:r>
-              <a:rPr lang="en-US" sz="2000" b="1" dirty="0">
-                <a:solidFill>
-                  <a:srgbClr val="1F497D"/>
-                </a:solidFill>
-                <a:latin typeface="Arial" pitchFamily="34" charset="0"/>
-                <a:ea typeface="Arial" pitchFamily="34" charset="-122"/>
-                <a:cs typeface="Arial" pitchFamily="34" charset="-120"/>
-              </a:rPr>
-              <a:t>Sacrifice: </a:t>
-            </a:r>
-            <a:r>
-              <a:rPr lang="en-US" sz="2000" i="1" dirty="0">
-                <a:solidFill>
-                  <a:srgbClr val="000000"/>
-                </a:solidFill>
-                <a:latin typeface="Arial" pitchFamily="34" charset="0"/>
-                <a:ea typeface="Arial" pitchFamily="34" charset="-122"/>
-                <a:cs typeface="Arial" pitchFamily="34" charset="-120"/>
-              </a:rPr>
-              <a:t>“Take your son </a:t>
-            </a:r>
-            <a:r>
-              <a:rPr lang="en-US" sz="2000" i="1" dirty="0">
-                <a:solidFill>
-                  <a:srgbClr val="000000"/>
-                </a:solidFill>
-                <a:latin typeface="Arial" pitchFamily="34" charset="0"/>
-                <a:ea typeface="Arial" pitchFamily="34" charset="-122"/>
-                <a:cs typeface="Arial" pitchFamily="34" charset="-120"/>
-                <a:sym typeface="Wingdings" pitchFamily="2" charset="2"/>
-              </a:rPr>
-              <a:t></a:t>
-            </a:r>
-            <a:r>
-              <a:rPr lang="en-US" sz="2000" i="1" dirty="0">
-                <a:solidFill>
-                  <a:srgbClr val="000000"/>
-                </a:solidFill>
-                <a:latin typeface="Arial" pitchFamily="34" charset="0"/>
-                <a:ea typeface="Arial" pitchFamily="34" charset="-122"/>
-                <a:cs typeface="Arial" pitchFamily="34" charset="-120"/>
-              </a:rPr>
-              <a:t> your only son, whom you love” </a:t>
-            </a:r>
-            <a:r>
-              <a:rPr lang="en-US" sz="2000" dirty="0">
-                <a:solidFill>
-                  <a:srgbClr val="000000"/>
-                </a:solidFill>
-                <a:latin typeface="Arial" pitchFamily="34" charset="0"/>
-                <a:ea typeface="Arial" pitchFamily="34" charset="-122"/>
-                <a:cs typeface="Arial" pitchFamily="34" charset="-120"/>
-              </a:rPr>
-              <a:t>(Gen 22:2). Faith became visible at the raised knife (Heb 11:17–19).</a:t>
-            </a:r>
-            <a:endParaRPr lang="en-US" sz="2000" dirty="0"/>
-          </a:p>
-        </p:txBody>
-      </p:sp>
-      <p:sp>
-        <p:nvSpPr>
-          <p:cNvPr id="13" name="L4box"/>
-          <p:cNvSpPr/>
-          <p:nvPr/>
-        </p:nvSpPr>
-        <p:spPr>
-          <a:xfrm>
-            <a:off x="457200" y="1239533"/>
-            <a:ext cx="3200400" cy="1024128"/>
-          </a:xfrm>
-          <a:prstGeom prst="roundRect">
-            <a:avLst>
-              <a:gd name="adj" fmla="val 7143"/>
-            </a:avLst>
-          </a:prstGeom>
-          <a:solidFill>
-            <a:srgbClr val="1F497D"/>
-          </a:solidFill>
-          <a:ln w="12700">
-            <a:solidFill>
-              <a:srgbClr val="1F497D"/>
-            </a:solidFill>
-            <a:prstDash val="solid"/>
-          </a:ln>
-        </p:spPr>
-        <p:txBody>
-          <a:bodyPr/>
-          <a:lstStyle/>
-          <a:p>
-            <a:endParaRPr lang="en-US"/>
-          </a:p>
-        </p:txBody>
-      </p:sp>
-      <p:sp>
-        <p:nvSpPr>
-          <p:cNvPr id="14" name="L4lbl"/>
-          <p:cNvSpPr txBox="1"/>
-          <p:nvPr/>
-        </p:nvSpPr>
-        <p:spPr>
-          <a:xfrm>
-            <a:off x="457200" y="1358405"/>
-            <a:ext cx="3200400" cy="822960"/>
-          </a:xfrm>
-          <a:prstGeom prst="rect">
-            <a:avLst/>
-          </a:prstGeom>
-          <a:noFill/>
-          <a:ln/>
-        </p:spPr>
-        <p:txBody>
-          <a:bodyPr wrap="square" lIns="0" tIns="0" rIns="0" bIns="0" rtlCol="0" anchor="t"/>
-          <a:lstStyle/>
-          <a:p>
-            <a:pPr marL="0" indent="0" algn="ctr">
-              <a:buNone/>
-            </a:pPr>
-            <a:r>
-              <a:rPr lang="en-US" sz="2000" b="1" dirty="0">
-                <a:solidFill>
-                  <a:srgbClr val="FFFFFF"/>
-                </a:solidFill>
-                <a:latin typeface="Arial" pitchFamily="34" charset="0"/>
-                <a:ea typeface="Arial" pitchFamily="34" charset="-122"/>
-                <a:cs typeface="Arial" pitchFamily="34" charset="-120"/>
-              </a:rPr>
-              <a:t>4. Obedience of Faith</a:t>
-            </a:r>
-            <a:endParaRPr lang="en-US" dirty="0"/>
-          </a:p>
-          <a:p>
-            <a:pPr marL="0" indent="0" algn="ctr">
-              <a:buNone/>
-            </a:pPr>
-            <a:r>
-              <a:rPr lang="en-US" sz="2000" dirty="0">
-                <a:solidFill>
-                  <a:srgbClr val="FFFFFF"/>
-                </a:solidFill>
-                <a:latin typeface="Arial" pitchFamily="34" charset="0"/>
-                <a:ea typeface="Arial" pitchFamily="34" charset="-122"/>
-                <a:cs typeface="Arial" pitchFamily="34" charset="-120"/>
-              </a:rPr>
-              <a:t>the SETTLED PATTERN (Romans 1:5; 16:26)</a:t>
-            </a:r>
-            <a:endParaRPr lang="en-US" sz="2000" dirty="0"/>
-          </a:p>
-        </p:txBody>
-      </p:sp>
-      <p:sp>
-        <p:nvSpPr>
-          <p:cNvPr id="15" name="L4txt"/>
-          <p:cNvSpPr txBox="1"/>
-          <p:nvPr/>
-        </p:nvSpPr>
-        <p:spPr>
-          <a:xfrm>
-            <a:off x="3931920" y="1257821"/>
-            <a:ext cx="4983480" cy="1051560"/>
-          </a:xfrm>
-          <a:prstGeom prst="rect">
-            <a:avLst/>
-          </a:prstGeom>
-          <a:noFill/>
-          <a:ln/>
-        </p:spPr>
-        <p:txBody>
-          <a:bodyPr wrap="square" lIns="0" tIns="0" rIns="0" bIns="0" rtlCol="0" anchor="ctr"/>
-          <a:lstStyle/>
-          <a:p>
-            <a:pPr marL="0" indent="0" algn="l">
-              <a:buNone/>
-            </a:pPr>
-            <a:r>
-              <a:rPr lang="en-US" sz="2000" b="1" dirty="0">
-                <a:solidFill>
-                  <a:srgbClr val="1F497D"/>
-                </a:solidFill>
-                <a:latin typeface="Arial" pitchFamily="34" charset="0"/>
-                <a:ea typeface="Arial" pitchFamily="34" charset="-122"/>
-                <a:cs typeface="Arial" pitchFamily="34" charset="-120"/>
-              </a:rPr>
-              <a:t>Obedience of Faith: </a:t>
-            </a:r>
-            <a:r>
-              <a:rPr lang="en-US" sz="2000" dirty="0">
-                <a:solidFill>
-                  <a:srgbClr val="000000"/>
-                </a:solidFill>
-                <a:latin typeface="Arial" pitchFamily="34" charset="0"/>
-                <a:ea typeface="Arial" pitchFamily="34" charset="-122"/>
-                <a:cs typeface="Arial" pitchFamily="34" charset="-120"/>
-              </a:rPr>
-              <a:t>The whole gospel stack aligned </a:t>
-            </a:r>
-            <a:r>
-              <a:rPr lang="en-US" sz="2000" dirty="0">
-                <a:solidFill>
-                  <a:srgbClr val="000000"/>
-                </a:solidFill>
-                <a:latin typeface="Arial" pitchFamily="34" charset="0"/>
-                <a:ea typeface="Arial" pitchFamily="34" charset="-122"/>
-                <a:cs typeface="Arial" pitchFamily="34" charset="-120"/>
-                <a:sym typeface="Wingdings" pitchFamily="2" charset="2"/>
-              </a:rPr>
-              <a:t></a:t>
-            </a:r>
-            <a:r>
-              <a:rPr lang="en-US" sz="2000" dirty="0">
-                <a:solidFill>
-                  <a:srgbClr val="000000"/>
-                </a:solidFill>
-                <a:latin typeface="Arial" pitchFamily="34" charset="0"/>
-                <a:ea typeface="Arial" pitchFamily="34" charset="-122"/>
-                <a:cs typeface="Arial" pitchFamily="34" charset="-120"/>
-              </a:rPr>
-              <a:t> a life reorganized around what it claims. Not one dramatic act.</a:t>
-            </a:r>
-            <a:endParaRPr lang="en-US" sz="2000" dirty="0"/>
-          </a:p>
-        </p:txBody>
-      </p:sp>
-    </p:spTree>
-  </p:cSld>
-  <p:clrMapOvr>
-    <a:masterClrMapping/>
-  </p:clrMapOvr>
-  <p:timing>
-    <p:tnLst>
-      <p:par>
-        <p:cTn id="1" dur="indefinite" restart="never" nodeType="tmRoot">
-          <p:childTnLst>
-            <p:seq concurrent="1" nextAc="seek">
-              <p:cTn id="2" dur="indefinite" nodeType="mainSeq">
-                <p:childTnLst>
-                  <p:par>
-                    <p:cTn id="3" fill="hold">
-                      <p:stCondLst>
-                        <p:cond delay="indefinite"/>
-                      </p:stCondLst>
-                      <p:childTnLst>
-                        <p:par>
-                          <p:cTn id="4" fill="hold">
-                            <p:stCondLst>
-                              <p:cond delay="0"/>
-                            </p:stCondLst>
-                            <p:childTnLst>
-                              <p:par>
-                                <p:cTn id="5" presetID="42" presetClass="entr" presetSubtype="0" fill="hold" nodeType="clickEffect">
-                                  <p:stCondLst>
-                                    <p:cond delay="0"/>
-                                  </p:stCondLst>
-                                  <p:childTnLst>
-                                    <p:set>
-                                      <p:cBhvr>
-                                        <p:cTn id="6" dur="1" fill="hold">
-                                          <p:stCondLst>
-                                            <p:cond delay="0"/>
-                                          </p:stCondLst>
-                                        </p:cTn>
-                                        <p:tgtEl>
-                                          <p:spTgt spid="4"/>
-                                        </p:tgtEl>
-                                        <p:attrNameLst>
-                                          <p:attrName>style.visibility</p:attrName>
-                                        </p:attrNameLst>
-                                      </p:cBhvr>
-                                      <p:to>
-                                        <p:strVal val="visible"/>
-                                      </p:to>
-                                    </p:set>
-                                    <p:animEffect transition="in" filter="fade">
-                                      <p:cBhvr>
-                                        <p:cTn id="7" dur="1000"/>
-                                        <p:tgtEl>
-                                          <p:spTgt spid="4"/>
-                                        </p:tgtEl>
-                                      </p:cBhvr>
-                                    </p:animEffect>
-                                    <p:anim calcmode="lin" valueType="num">
-                                      <p:cBhvr>
-                                        <p:cTn id="8" dur="1000" fill="hold"/>
-                                        <p:tgtEl>
-                                          <p:spTgt spid="4"/>
-                                        </p:tgtEl>
-                                        <p:attrNameLst>
-                                          <p:attrName>ppt_y</p:attrName>
-                                        </p:attrNameLst>
-                                      </p:cBhvr>
-                                      <p:tavLst>
-                                        <p:tav tm="0">
-                                          <p:val>
-                                            <p:strVal val="#ppt_y+.1"/>
-                                          </p:val>
-                                        </p:tav>
-                                        <p:tav tm="100000">
-                                          <p:val>
-                                            <p:strVal val="#ppt_y"/>
-                                          </p:val>
-                                        </p:tav>
-                                      </p:tavLst>
-                                    </p:anim>
-                                  </p:childTnLst>
-                                </p:cTn>
-                              </p:par>
-                              <p:par>
-                                <p:cTn id="9" presetID="42" presetClass="entr" presetSubtype="0" fill="hold" nodeType="withEffect">
-                                  <p:stCondLst>
-                                    <p:cond delay="0"/>
-                                  </p:stCondLst>
-                                  <p:childTnLst>
-                                    <p:set>
-                                      <p:cBhvr>
-                                        <p:cTn id="10" dur="1" fill="hold">
-                                          <p:stCondLst>
-                                            <p:cond delay="0"/>
-                                          </p:stCondLst>
-                                        </p:cTn>
-                                        <p:tgtEl>
-                                          <p:spTgt spid="5"/>
-                                        </p:tgtEl>
-                                        <p:attrNameLst>
-                                          <p:attrName>style.visibility</p:attrName>
-                                        </p:attrNameLst>
-                                      </p:cBhvr>
-                                      <p:to>
-                                        <p:strVal val="visible"/>
-                                      </p:to>
-                                    </p:set>
-                                    <p:animEffect transition="in" filter="fade">
-                                      <p:cBhvr>
-                                        <p:cTn id="11" dur="1000"/>
-                                        <p:tgtEl>
-                                          <p:spTgt spid="5"/>
-                                        </p:tgtEl>
-                                      </p:cBhvr>
-                                    </p:animEffect>
-                                    <p:anim calcmode="lin" valueType="num">
-                                      <p:cBhvr>
-                                        <p:cTn id="12" dur="1000" fill="hold"/>
-                                        <p:tgtEl>
-                                          <p:spTgt spid="5"/>
-                                        </p:tgtEl>
-                                        <p:attrNameLst>
-                                          <p:attrName>ppt_y</p:attrName>
-                                        </p:attrNameLst>
-                                      </p:cBhvr>
-                                      <p:tavLst>
-                                        <p:tav tm="0">
-                                          <p:val>
-                                            <p:strVal val="#ppt_y+.1"/>
-                                          </p:val>
-                                        </p:tav>
-                                        <p:tav tm="100000">
-                                          <p:val>
-                                            <p:strVal val="#ppt_y"/>
-                                          </p:val>
-                                        </p:tav>
-                                      </p:tavLst>
-                                    </p:anim>
-                                  </p:childTnLst>
-                                </p:cTn>
-                              </p:par>
-                              <p:par>
-                                <p:cTn id="13" presetID="42" presetClass="entr" presetSubtype="0" fill="hold" nodeType="withEffect">
-                                  <p:stCondLst>
-                                    <p:cond delay="0"/>
-                                  </p:stCondLst>
-                                  <p:childTnLst>
-                                    <p:set>
-                                      <p:cBhvr>
-                                        <p:cTn id="14" dur="1" fill="hold">
-                                          <p:stCondLst>
-                                            <p:cond delay="0"/>
-                                          </p:stCondLst>
-                                        </p:cTn>
-                                        <p:tgtEl>
-                                          <p:spTgt spid="6"/>
-                                        </p:tgtEl>
-                                        <p:attrNameLst>
-                                          <p:attrName>style.visibility</p:attrName>
-                                        </p:attrNameLst>
-                                      </p:cBhvr>
-                                      <p:to>
-                                        <p:strVal val="visible"/>
-                                      </p:to>
-                                    </p:set>
-                                    <p:animEffect transition="in" filter="fade">
-                                      <p:cBhvr>
-                                        <p:cTn id="15" dur="1000"/>
-                                        <p:tgtEl>
-                                          <p:spTgt spid="6"/>
-                                        </p:tgtEl>
-                                      </p:cBhvr>
-                                    </p:animEffect>
-                                    <p:anim calcmode="lin" valueType="num">
-                                      <p:cBhvr>
-                                        <p:cTn id="16" dur="1000" fill="hold"/>
-                                        <p:tgtEl>
-                                          <p:spTgt spid="6"/>
-                                        </p:tgtEl>
-                                        <p:attrNameLst>
-                                          <p:attrName>ppt_y</p:attrName>
-                                        </p:attrNameLst>
-                                      </p:cBhvr>
-                                      <p:tavLst>
-                                        <p:tav tm="0">
-                                          <p:val>
-                                            <p:strVal val="#ppt_y+.1"/>
-                                          </p:val>
-                                        </p:tav>
-                                        <p:tav tm="100000">
-                                          <p:val>
-                                            <p:strVal val="#ppt_y"/>
-                                          </p:val>
-                                        </p:tav>
-                                      </p:tavLst>
-                                    </p:anim>
-                                  </p:childTnLst>
-                                </p:cTn>
-                              </p:par>
-                            </p:childTnLst>
-                          </p:cTn>
-                        </p:par>
-                      </p:childTnLst>
-                    </p:cTn>
-                  </p:par>
-                  <p:par>
-                    <p:cTn id="17" fill="hold">
-                      <p:stCondLst>
-                        <p:cond delay="indefinite"/>
-                      </p:stCondLst>
-                      <p:childTnLst>
-                        <p:par>
-                          <p:cTn id="18" fill="hold">
-                            <p:stCondLst>
-                              <p:cond delay="0"/>
-                            </p:stCondLst>
-                            <p:childTnLst>
-                              <p:par>
-                                <p:cTn id="19" presetID="42" presetClass="entr" presetSubtype="0" fill="hold" nodeType="clickEffect">
-                                  <p:stCondLst>
-                                    <p:cond delay="0"/>
-                                  </p:stCondLst>
-                                  <p:childTnLst>
-                                    <p:set>
-                                      <p:cBhvr>
-                                        <p:cTn id="20" dur="1" fill="hold">
-                                          <p:stCondLst>
-                                            <p:cond delay="0"/>
-                                          </p:stCondLst>
-                                        </p:cTn>
-                                        <p:tgtEl>
-                                          <p:spTgt spid="7"/>
-                                        </p:tgtEl>
-                                        <p:attrNameLst>
-                                          <p:attrName>style.visibility</p:attrName>
-                                        </p:attrNameLst>
-                                      </p:cBhvr>
-                                      <p:to>
-                                        <p:strVal val="visible"/>
-                                      </p:to>
-                                    </p:set>
-                                    <p:animEffect transition="in" filter="fade">
-                                      <p:cBhvr>
-                                        <p:cTn id="21" dur="1000"/>
-                                        <p:tgtEl>
-                                          <p:spTgt spid="7"/>
-                                        </p:tgtEl>
-                                      </p:cBhvr>
-                                    </p:animEffect>
-                                    <p:anim calcmode="lin" valueType="num">
-                                      <p:cBhvr>
-                                        <p:cTn id="22" dur="1000" fill="hold"/>
-                                        <p:tgtEl>
-                                          <p:spTgt spid="7"/>
-                                        </p:tgtEl>
-                                        <p:attrNameLst>
-                                          <p:attrName>ppt_y</p:attrName>
-                                        </p:attrNameLst>
-                                      </p:cBhvr>
-                                      <p:tavLst>
-                                        <p:tav tm="0">
-                                          <p:val>
-                                            <p:strVal val="#ppt_y+.1"/>
-                                          </p:val>
-                                        </p:tav>
-                                        <p:tav tm="100000">
-                                          <p:val>
-                                            <p:strVal val="#ppt_y"/>
-                                          </p:val>
-                                        </p:tav>
-                                      </p:tavLst>
-                                    </p:anim>
-                                  </p:childTnLst>
-                                </p:cTn>
-                              </p:par>
-                              <p:par>
-                                <p:cTn id="23" presetID="42" presetClass="entr" presetSubtype="0" fill="hold" nodeType="withEffect">
-                                  <p:stCondLst>
-                                    <p:cond delay="0"/>
-                                  </p:stCondLst>
-                                  <p:childTnLst>
-                                    <p:set>
-                                      <p:cBhvr>
-                                        <p:cTn id="24" dur="1" fill="hold">
-                                          <p:stCondLst>
-                                            <p:cond delay="0"/>
-                                          </p:stCondLst>
-                                        </p:cTn>
-                                        <p:tgtEl>
-                                          <p:spTgt spid="8"/>
-                                        </p:tgtEl>
-                                        <p:attrNameLst>
-                                          <p:attrName>style.visibility</p:attrName>
-                                        </p:attrNameLst>
-                                      </p:cBhvr>
-                                      <p:to>
-                                        <p:strVal val="visible"/>
-                                      </p:to>
-                                    </p:set>
-                                    <p:animEffect transition="in" filter="fade">
-                                      <p:cBhvr>
-                                        <p:cTn id="25" dur="1000"/>
-                                        <p:tgtEl>
-                                          <p:spTgt spid="8"/>
-                                        </p:tgtEl>
-                                      </p:cBhvr>
-                                    </p:animEffect>
-                                    <p:anim calcmode="lin" valueType="num">
-                                      <p:cBhvr>
-                                        <p:cTn id="26" dur="1000" fill="hold"/>
-                                        <p:tgtEl>
-                                          <p:spTgt spid="8"/>
-                                        </p:tgtEl>
-                                        <p:attrNameLst>
-                                          <p:attrName>ppt_y</p:attrName>
-                                        </p:attrNameLst>
-                                      </p:cBhvr>
-                                      <p:tavLst>
-                                        <p:tav tm="0">
-                                          <p:val>
-                                            <p:strVal val="#ppt_y+.1"/>
-                                          </p:val>
-                                        </p:tav>
-                                        <p:tav tm="100000">
-                                          <p:val>
-                                            <p:strVal val="#ppt_y"/>
-                                          </p:val>
-                                        </p:tav>
-                                      </p:tavLst>
-                                    </p:anim>
-                                  </p:childTnLst>
-                                </p:cTn>
-                              </p:par>
-                              <p:par>
-                                <p:cTn id="27" presetID="42" presetClass="entr" presetSubtype="0" fill="hold" nodeType="withEffect">
-                                  <p:stCondLst>
-                                    <p:cond delay="0"/>
-                                  </p:stCondLst>
-                                  <p:childTnLst>
-                                    <p:set>
-                                      <p:cBhvr>
-                                        <p:cTn id="28" dur="1" fill="hold">
-                                          <p:stCondLst>
-                                            <p:cond delay="0"/>
-                                          </p:stCondLst>
-                                        </p:cTn>
-                                        <p:tgtEl>
-                                          <p:spTgt spid="9"/>
-                                        </p:tgtEl>
-                                        <p:attrNameLst>
-                                          <p:attrName>style.visibility</p:attrName>
-                                        </p:attrNameLst>
-                                      </p:cBhvr>
-                                      <p:to>
-                                        <p:strVal val="visible"/>
-                                      </p:to>
-                                    </p:set>
-                                    <p:animEffect transition="in" filter="fade">
-                                      <p:cBhvr>
-                                        <p:cTn id="29" dur="1000"/>
-                                        <p:tgtEl>
-                                          <p:spTgt spid="9"/>
-                                        </p:tgtEl>
-                                      </p:cBhvr>
-                                    </p:animEffect>
-                                    <p:anim calcmode="lin" valueType="num">
-                                      <p:cBhvr>
-                                        <p:cTn id="30" dur="1000" fill="hold"/>
-                                        <p:tgtEl>
-                                          <p:spTgt spid="9"/>
-                                        </p:tgtEl>
-                                        <p:attrNameLst>
-                                          <p:attrName>ppt_y</p:attrName>
-                                        </p:attrNameLst>
-                                      </p:cBhvr>
-                                      <p:tavLst>
-                                        <p:tav tm="0">
-                                          <p:val>
-                                            <p:strVal val="#ppt_y+.1"/>
-                                          </p:val>
-                                        </p:tav>
-                                        <p:tav tm="100000">
-                                          <p:val>
-                                            <p:strVal val="#ppt_y"/>
-                                          </p:val>
-                                        </p:tav>
-                                      </p:tavLst>
-                                    </p:anim>
-                                  </p:childTnLst>
-                                </p:cTn>
-                              </p:par>
-                            </p:childTnLst>
-                          </p:cTn>
-                        </p:par>
-                      </p:childTnLst>
-                    </p:cTn>
-                  </p:par>
-                  <p:par>
-                    <p:cTn id="31" fill="hold">
-                      <p:stCondLst>
-                        <p:cond delay="indefinite"/>
-                      </p:stCondLst>
-                      <p:childTnLst>
-                        <p:par>
-                          <p:cTn id="32" fill="hold">
-                            <p:stCondLst>
-                              <p:cond delay="0"/>
-                            </p:stCondLst>
-                            <p:childTnLst>
-                              <p:par>
-                                <p:cTn id="33" presetID="42" presetClass="entr" presetSubtype="0" fill="hold" nodeType="clickEffect">
-                                  <p:stCondLst>
-                                    <p:cond delay="0"/>
-                                  </p:stCondLst>
-                                  <p:childTnLst>
-                                    <p:set>
-                                      <p:cBhvr>
-                                        <p:cTn id="34" dur="1" fill="hold">
-                                          <p:stCondLst>
-                                            <p:cond delay="0"/>
-                                          </p:stCondLst>
-                                        </p:cTn>
-                                        <p:tgtEl>
-                                          <p:spTgt spid="10"/>
-                                        </p:tgtEl>
-                                        <p:attrNameLst>
-                                          <p:attrName>style.visibility</p:attrName>
-                                        </p:attrNameLst>
-                                      </p:cBhvr>
-                                      <p:to>
-                                        <p:strVal val="visible"/>
-                                      </p:to>
-                                    </p:set>
-                                    <p:animEffect transition="in" filter="fade">
-                                      <p:cBhvr>
-                                        <p:cTn id="35" dur="1000"/>
-                                        <p:tgtEl>
-                                          <p:spTgt spid="10"/>
-                                        </p:tgtEl>
-                                      </p:cBhvr>
-                                    </p:animEffect>
-                                    <p:anim calcmode="lin" valueType="num">
-                                      <p:cBhvr>
-                                        <p:cTn id="36" dur="1000" fill="hold"/>
-                                        <p:tgtEl>
-                                          <p:spTgt spid="10"/>
-                                        </p:tgtEl>
-                                        <p:attrNameLst>
-                                          <p:attrName>ppt_y</p:attrName>
-                                        </p:attrNameLst>
-                                      </p:cBhvr>
-                                      <p:tavLst>
-                                        <p:tav tm="0">
-                                          <p:val>
-                                            <p:strVal val="#ppt_y+.1"/>
-                                          </p:val>
-                                        </p:tav>
-                                        <p:tav tm="100000">
-                                          <p:val>
-                                            <p:strVal val="#ppt_y"/>
-                                          </p:val>
-                                        </p:tav>
-                                      </p:tavLst>
-                                    </p:anim>
-                                  </p:childTnLst>
-                                </p:cTn>
-                              </p:par>
-                              <p:par>
-                                <p:cTn id="37" presetID="42" presetClass="entr" presetSubtype="0" fill="hold" nodeType="withEffect">
-                                  <p:stCondLst>
-                                    <p:cond delay="0"/>
-                                  </p:stCondLst>
-                                  <p:childTnLst>
-                                    <p:set>
-                                      <p:cBhvr>
-                                        <p:cTn id="38" dur="1" fill="hold">
-                                          <p:stCondLst>
-                                            <p:cond delay="0"/>
-                                          </p:stCondLst>
-                                        </p:cTn>
-                                        <p:tgtEl>
-                                          <p:spTgt spid="11"/>
-                                        </p:tgtEl>
-                                        <p:attrNameLst>
-                                          <p:attrName>style.visibility</p:attrName>
-                                        </p:attrNameLst>
-                                      </p:cBhvr>
-                                      <p:to>
-                                        <p:strVal val="visible"/>
-                                      </p:to>
-                                    </p:set>
-                                    <p:animEffect transition="in" filter="fade">
-                                      <p:cBhvr>
-                                        <p:cTn id="39" dur="1000"/>
-                                        <p:tgtEl>
-                                          <p:spTgt spid="11"/>
-                                        </p:tgtEl>
-                                      </p:cBhvr>
-                                    </p:animEffect>
-                                    <p:anim calcmode="lin" valueType="num">
-                                      <p:cBhvr>
-                                        <p:cTn id="40" dur="1000" fill="hold"/>
-                                        <p:tgtEl>
-                                          <p:spTgt spid="11"/>
-                                        </p:tgtEl>
-                                        <p:attrNameLst>
-                                          <p:attrName>ppt_y</p:attrName>
-                                        </p:attrNameLst>
-                                      </p:cBhvr>
-                                      <p:tavLst>
-                                        <p:tav tm="0">
-                                          <p:val>
-                                            <p:strVal val="#ppt_y+.1"/>
-                                          </p:val>
-                                        </p:tav>
-                                        <p:tav tm="100000">
-                                          <p:val>
-                                            <p:strVal val="#ppt_y"/>
-                                          </p:val>
-                                        </p:tav>
-                                      </p:tavLst>
-                                    </p:anim>
-                                  </p:childTnLst>
-                                </p:cTn>
-                              </p:par>
-                              <p:par>
-                                <p:cTn id="41" presetID="42" presetClass="entr" presetSubtype="0" fill="hold" nodeType="withEffect">
-                                  <p:stCondLst>
-                                    <p:cond delay="0"/>
-                                  </p:stCondLst>
-                                  <p:childTnLst>
-                                    <p:set>
-                                      <p:cBhvr>
-                                        <p:cTn id="42" dur="1" fill="hold">
-                                          <p:stCondLst>
-                                            <p:cond delay="0"/>
-                                          </p:stCondLst>
-                                        </p:cTn>
-                                        <p:tgtEl>
-                                          <p:spTgt spid="12"/>
-                                        </p:tgtEl>
-                                        <p:attrNameLst>
-                                          <p:attrName>style.visibility</p:attrName>
-                                        </p:attrNameLst>
-                                      </p:cBhvr>
-                                      <p:to>
-                                        <p:strVal val="visible"/>
-                                      </p:to>
-                                    </p:set>
-                                    <p:animEffect transition="in" filter="fade">
-                                      <p:cBhvr>
-                                        <p:cTn id="43" dur="1000"/>
-                                        <p:tgtEl>
-                                          <p:spTgt spid="12"/>
-                                        </p:tgtEl>
-                                      </p:cBhvr>
-                                    </p:animEffect>
-                                    <p:anim calcmode="lin" valueType="num">
-                                      <p:cBhvr>
-                                        <p:cTn id="44" dur="1000" fill="hold"/>
-                                        <p:tgtEl>
-                                          <p:spTgt spid="12"/>
-                                        </p:tgtEl>
-                                        <p:attrNameLst>
-                                          <p:attrName>ppt_y</p:attrName>
-                                        </p:attrNameLst>
-                                      </p:cBhvr>
-                                      <p:tavLst>
-                                        <p:tav tm="0">
-                                          <p:val>
-                                            <p:strVal val="#ppt_y+.1"/>
-                                          </p:val>
-                                        </p:tav>
-                                        <p:tav tm="100000">
-                                          <p:val>
-                                            <p:strVal val="#ppt_y"/>
-                                          </p:val>
-                                        </p:tav>
-                                      </p:tavLst>
-                                    </p:anim>
-                                  </p:childTnLst>
-                                </p:cTn>
-                              </p:par>
-                            </p:childTnLst>
-                          </p:cTn>
-                        </p:par>
-                      </p:childTnLst>
-                    </p:cTn>
-                  </p:par>
-                  <p:par>
-                    <p:cTn id="45" fill="hold">
-                      <p:stCondLst>
-                        <p:cond delay="indefinite"/>
-                      </p:stCondLst>
-                      <p:childTnLst>
-                        <p:par>
-                          <p:cTn id="46" fill="hold">
-                            <p:stCondLst>
-                              <p:cond delay="0"/>
-                            </p:stCondLst>
-                            <p:childTnLst>
-                              <p:par>
-                                <p:cTn id="47" presetID="42" presetClass="entr" presetSubtype="0" fill="hold" nodeType="clickEffect">
-                                  <p:stCondLst>
-                                    <p:cond delay="0"/>
-                                  </p:stCondLst>
-                                  <p:childTnLst>
-                                    <p:set>
-                                      <p:cBhvr>
-                                        <p:cTn id="48" dur="1" fill="hold">
-                                          <p:stCondLst>
-                                            <p:cond delay="0"/>
-                                          </p:stCondLst>
-                                        </p:cTn>
-                                        <p:tgtEl>
-                                          <p:spTgt spid="13"/>
-                                        </p:tgtEl>
-                                        <p:attrNameLst>
-                                          <p:attrName>style.visibility</p:attrName>
-                                        </p:attrNameLst>
-                                      </p:cBhvr>
-                                      <p:to>
-                                        <p:strVal val="visible"/>
-                                      </p:to>
-                                    </p:set>
-                                    <p:animEffect transition="in" filter="fade">
-                                      <p:cBhvr>
-                                        <p:cTn id="49" dur="1000"/>
-                                        <p:tgtEl>
-                                          <p:spTgt spid="13"/>
-                                        </p:tgtEl>
-                                      </p:cBhvr>
-                                    </p:animEffect>
-                                    <p:anim calcmode="lin" valueType="num">
-                                      <p:cBhvr>
-                                        <p:cTn id="50" dur="1000" fill="hold"/>
-                                        <p:tgtEl>
-                                          <p:spTgt spid="13"/>
-                                        </p:tgtEl>
-                                        <p:attrNameLst>
-                                          <p:attrName>ppt_y</p:attrName>
-                                        </p:attrNameLst>
-                                      </p:cBhvr>
-                                      <p:tavLst>
-                                        <p:tav tm="0">
-                                          <p:val>
-                                            <p:strVal val="#ppt_y+.1"/>
-                                          </p:val>
-                                        </p:tav>
-                                        <p:tav tm="100000">
-                                          <p:val>
-                                            <p:strVal val="#ppt_y"/>
-                                          </p:val>
-                                        </p:tav>
-                                      </p:tavLst>
-                                    </p:anim>
-                                  </p:childTnLst>
-                                </p:cTn>
-                              </p:par>
-                              <p:par>
-                                <p:cTn id="51" presetID="42" presetClass="entr" presetSubtype="0" fill="hold" nodeType="withEffect">
-                                  <p:stCondLst>
-                                    <p:cond delay="0"/>
-                                  </p:stCondLst>
-                                  <p:childTnLst>
-                                    <p:set>
-                                      <p:cBhvr>
-                                        <p:cTn id="52" dur="1" fill="hold">
-                                          <p:stCondLst>
-                                            <p:cond delay="0"/>
-                                          </p:stCondLst>
-                                        </p:cTn>
-                                        <p:tgtEl>
-                                          <p:spTgt spid="14"/>
-                                        </p:tgtEl>
-                                        <p:attrNameLst>
-                                          <p:attrName>style.visibility</p:attrName>
-                                        </p:attrNameLst>
-                                      </p:cBhvr>
-                                      <p:to>
-                                        <p:strVal val="visible"/>
-                                      </p:to>
-                                    </p:set>
-                                    <p:animEffect transition="in" filter="fade">
-                                      <p:cBhvr>
-                                        <p:cTn id="53" dur="1000"/>
-                                        <p:tgtEl>
-                                          <p:spTgt spid="14"/>
-                                        </p:tgtEl>
-                                      </p:cBhvr>
-                                    </p:animEffect>
-                                    <p:anim calcmode="lin" valueType="num">
-                                      <p:cBhvr>
-                                        <p:cTn id="54" dur="1000" fill="hold"/>
-                                        <p:tgtEl>
-                                          <p:spTgt spid="14"/>
-                                        </p:tgtEl>
-                                        <p:attrNameLst>
-                                          <p:attrName>ppt_y</p:attrName>
-                                        </p:attrNameLst>
-                                      </p:cBhvr>
-                                      <p:tavLst>
-                                        <p:tav tm="0">
-                                          <p:val>
-                                            <p:strVal val="#ppt_y+.1"/>
-                                          </p:val>
-                                        </p:tav>
-                                        <p:tav tm="100000">
-                                          <p:val>
-                                            <p:strVal val="#ppt_y"/>
-                                          </p:val>
-                                        </p:tav>
-                                      </p:tavLst>
-                                    </p:anim>
-                                  </p:childTnLst>
-                                </p:cTn>
-                              </p:par>
-                              <p:par>
-                                <p:cTn id="55" presetID="42" presetClass="entr" presetSubtype="0" fill="hold" nodeType="withEffect">
-                                  <p:stCondLst>
-                                    <p:cond delay="0"/>
-                                  </p:stCondLst>
-                                  <p:childTnLst>
-                                    <p:set>
-                                      <p:cBhvr>
-                                        <p:cTn id="56" dur="1" fill="hold">
-                                          <p:stCondLst>
-                                            <p:cond delay="0"/>
-                                          </p:stCondLst>
-                                        </p:cTn>
-                                        <p:tgtEl>
-                                          <p:spTgt spid="15"/>
-                                        </p:tgtEl>
-                                        <p:attrNameLst>
-                                          <p:attrName>style.visibility</p:attrName>
-                                        </p:attrNameLst>
-                                      </p:cBhvr>
-                                      <p:to>
-                                        <p:strVal val="visible"/>
-                                      </p:to>
-                                    </p:set>
-                                    <p:animEffect transition="in" filter="fade">
-                                      <p:cBhvr>
-                                        <p:cTn id="57" dur="1000"/>
-                                        <p:tgtEl>
-                                          <p:spTgt spid="15"/>
-                                        </p:tgtEl>
-                                      </p:cBhvr>
-                                    </p:animEffect>
-                                    <p:anim calcmode="lin" valueType="num">
-                                      <p:cBhvr>
-                                        <p:cTn id="58" dur="1000" fill="hold"/>
-                                        <p:tgtEl>
-                                          <p:spTgt spid="15"/>
-                                        </p:tgtEl>
-                                        <p:attrNameLst>
-                                          <p:attrName>ppt_y</p:attrName>
-                                        </p:attrNameLst>
-                                      </p:cBhvr>
-                                      <p:tavLst>
-                                        <p:tav tm="0">
-                                          <p:val>
-                                            <p:strVal val="#ppt_y+.1"/>
-                                          </p:val>
-                                        </p:tav>
-                                        <p:tav tm="100000">
-                                          <p:val>
-                                            <p:strVal val="#ppt_y"/>
-                                          </p:val>
-                                        </p:tav>
-                                      </p:tavLst>
-                                    </p:anim>
-                                  </p:childTnLst>
-                                </p:cTn>
-                              </p:par>
-                            </p:childTnLst>
-                          </p:cTn>
-                        </p:par>
-                      </p:childTnLst>
-                    </p:cTn>
-                  </p:par>
-                </p:childTnLst>
-              </p:cTn>
-              <p:prevCondLst>
-                <p:cond evt="onPrev" delay="0">
-                  <p:tgtEl>
-                    <p:sldTgt/>
-                  </p:tgtEl>
-                </p:cond>
-              </p:prevCondLst>
-              <p:nextCondLst>
-                <p:cond evt="onNext" delay="0">
-                  <p:tgtEl>
-                    <p:sldTgt/>
-                  </p:tgtEl>
-                </p:cond>
-              </p:nextCondLst>
-            </p:seq>
-          </p:childTnLst>
-        </p:cTn>
-      </p:par>
-    </p:tnLst>
-  </p:timing>
-</p:sld>
-</file>
-
-<file path=ppt/slides/slide4.xml><?xml version="1.0" encoding="utf-8"?>
-<p:sld xmlns:a="http://schemas.openxmlformats.org/drawingml/2006/main" xmlns:r="http://schemas.openxmlformats.org/officeDocument/2006/relationships" xmlns:p="http://schemas.openxmlformats.org/presentationml/2006/main">
-  <p:cSld>
     <p:bg>
       <p:bgPr>
         <a:solidFill>
@@ -4146,6 +2514,1726 @@
   <p:clrMapOvr>
     <a:masterClrMapping/>
   </p:clrMapOvr>
+</p:sld>
+</file>
+
+<file path=ppt/slides/slide4.xml><?xml version="1.0" encoding="utf-8"?>
+<p:sld xmlns:a="http://schemas.openxmlformats.org/drawingml/2006/main" xmlns:r="http://schemas.openxmlformats.org/officeDocument/2006/relationships" xmlns:p="http://schemas.openxmlformats.org/presentationml/2006/main">
+  <p:cSld>
+    <p:spTree>
+      <p:nvGrpSpPr>
+        <p:cNvPr id="1" name=""/>
+        <p:cNvGrpSpPr/>
+        <p:nvPr/>
+      </p:nvGrpSpPr>
+      <p:grpSpPr>
+        <a:xfrm>
+          <a:off x="0" y="0"/>
+          <a:ext cx="0" cy="0"/>
+          <a:chOff x="0" y="0"/>
+          <a:chExt cx="0" cy="0"/>
+        </a:xfrm>
+      </p:grpSpPr>
+      <p:sp>
+        <p:nvSpPr>
+          <p:cNvPr id="2" name="HeadTitle"/>
+          <p:cNvSpPr txBox="1"/>
+          <p:nvPr/>
+        </p:nvSpPr>
+        <p:spPr>
+          <a:xfrm>
+            <a:off x="228600" y="109728"/>
+            <a:ext cx="8686800" cy="502920"/>
+          </a:xfrm>
+          <a:prstGeom prst="rect">
+            <a:avLst/>
+          </a:prstGeom>
+          <a:noFill/>
+          <a:ln/>
+        </p:spPr>
+        <p:txBody>
+          <a:bodyPr wrap="square" lIns="0" tIns="0" rIns="0" bIns="0" rtlCol="0" anchor="t"/>
+          <a:lstStyle/>
+          <a:p>
+            <a:pPr marL="0" indent="0" algn="l">
+              <a:buNone/>
+            </a:pPr>
+            <a:r>
+              <a:rPr lang="en-US" sz="2600" b="1" dirty="0">
+                <a:solidFill>
+                  <a:srgbClr val="1F497D"/>
+                </a:solidFill>
+                <a:latin typeface="Arial" pitchFamily="34" charset="0"/>
+                <a:ea typeface="Arial" pitchFamily="34" charset="-122"/>
+                <a:cs typeface="Arial" pitchFamily="34" charset="-120"/>
+              </a:rPr>
+              <a:t>Four Concepts that Scripture Uses with Precision</a:t>
+            </a:r>
+            <a:endParaRPr lang="en-US" sz="1600" dirty="0"/>
+          </a:p>
+        </p:txBody>
+      </p:sp>
+      <p:sp>
+        <p:nvSpPr>
+          <p:cNvPr id="4" name="L1box"/>
+          <p:cNvSpPr/>
+          <p:nvPr/>
+        </p:nvSpPr>
+        <p:spPr>
+          <a:xfrm>
+            <a:off x="457200" y="4750829"/>
+            <a:ext cx="3200400" cy="1024128"/>
+          </a:xfrm>
+          <a:prstGeom prst="roundRect">
+            <a:avLst>
+              <a:gd name="adj" fmla="val 7143"/>
+            </a:avLst>
+          </a:prstGeom>
+          <a:solidFill>
+            <a:srgbClr val="1F497D"/>
+          </a:solidFill>
+          <a:ln w="12700">
+            <a:solidFill>
+              <a:srgbClr val="1F497D"/>
+            </a:solidFill>
+            <a:prstDash val="solid"/>
+          </a:ln>
+        </p:spPr>
+        <p:txBody>
+          <a:bodyPr/>
+          <a:lstStyle/>
+          <a:p>
+            <a:endParaRPr lang="en-US"/>
+          </a:p>
+        </p:txBody>
+      </p:sp>
+      <p:sp>
+        <p:nvSpPr>
+          <p:cNvPr id="5" name="L1lbl"/>
+          <p:cNvSpPr txBox="1"/>
+          <p:nvPr/>
+        </p:nvSpPr>
+        <p:spPr>
+          <a:xfrm>
+            <a:off x="457200" y="4869701"/>
+            <a:ext cx="3200400" cy="822960"/>
+          </a:xfrm>
+          <a:prstGeom prst="rect">
+            <a:avLst/>
+          </a:prstGeom>
+          <a:noFill/>
+          <a:ln/>
+        </p:spPr>
+        <p:txBody>
+          <a:bodyPr wrap="square" lIns="0" tIns="0" rIns="0" bIns="0" rtlCol="0" anchor="t"/>
+          <a:lstStyle/>
+          <a:p>
+            <a:pPr marL="0" indent="0" algn="ctr">
+              <a:buNone/>
+            </a:pPr>
+            <a:r>
+              <a:rPr lang="en-US" sz="2000" b="1" dirty="0">
+                <a:solidFill>
+                  <a:srgbClr val="FFFFFF"/>
+                </a:solidFill>
+                <a:latin typeface="Arial" pitchFamily="34" charset="0"/>
+                <a:ea typeface="Arial" pitchFamily="34" charset="-122"/>
+                <a:cs typeface="Arial" pitchFamily="34" charset="-120"/>
+              </a:rPr>
+              <a:t>1. Religion</a:t>
+            </a:r>
+            <a:endParaRPr lang="en-US" dirty="0"/>
+          </a:p>
+          <a:p>
+            <a:pPr marL="0" indent="0" algn="ctr">
+              <a:buNone/>
+            </a:pPr>
+            <a:r>
+              <a:rPr lang="en-US" sz="2000" dirty="0">
+                <a:solidFill>
+                  <a:srgbClr val="FFFFFF"/>
+                </a:solidFill>
+                <a:latin typeface="Arial" pitchFamily="34" charset="0"/>
+                <a:ea typeface="Arial" pitchFamily="34" charset="-122"/>
+                <a:cs typeface="Arial" pitchFamily="34" charset="-120"/>
+              </a:rPr>
+              <a:t>the FORM </a:t>
+            </a:r>
+            <a:r>
+              <a:rPr lang="en-US" sz="2000" dirty="0">
+                <a:solidFill>
+                  <a:srgbClr val="FFFFFF"/>
+                </a:solidFill>
+                <a:latin typeface="Arial" pitchFamily="34" charset="0"/>
+                <a:ea typeface="Arial" pitchFamily="34" charset="-122"/>
+                <a:cs typeface="Arial" pitchFamily="34" charset="-120"/>
+                <a:sym typeface="Wingdings" pitchFamily="2" charset="2"/>
+              </a:rPr>
+              <a:t></a:t>
+            </a:r>
+            <a:r>
+              <a:rPr lang="en-US" sz="2000" dirty="0">
+                <a:solidFill>
+                  <a:srgbClr val="FFFFFF"/>
+                </a:solidFill>
+                <a:latin typeface="Arial" pitchFamily="34" charset="0"/>
+                <a:ea typeface="Arial" pitchFamily="34" charset="-122"/>
+                <a:cs typeface="Arial" pitchFamily="34" charset="-120"/>
+              </a:rPr>
+              <a:t> observance, attendance, identity</a:t>
+            </a:r>
+            <a:endParaRPr lang="en-US" sz="2000" dirty="0"/>
+          </a:p>
+        </p:txBody>
+      </p:sp>
+      <p:sp>
+        <p:nvSpPr>
+          <p:cNvPr id="6" name="L1txt"/>
+          <p:cNvSpPr txBox="1"/>
+          <p:nvPr/>
+        </p:nvSpPr>
+        <p:spPr>
+          <a:xfrm>
+            <a:off x="3931920" y="4769117"/>
+            <a:ext cx="4983480" cy="1051560"/>
+          </a:xfrm>
+          <a:prstGeom prst="rect">
+            <a:avLst/>
+          </a:prstGeom>
+          <a:noFill/>
+          <a:ln/>
+        </p:spPr>
+        <p:txBody>
+          <a:bodyPr wrap="square" lIns="0" tIns="0" rIns="0" bIns="0" rtlCol="0" anchor="ctr"/>
+          <a:lstStyle/>
+          <a:p>
+            <a:pPr marL="0" indent="0" algn="l">
+              <a:buNone/>
+            </a:pPr>
+            <a:r>
+              <a:rPr lang="en-US" sz="2000" b="1" dirty="0">
+                <a:solidFill>
+                  <a:srgbClr val="1F497D"/>
+                </a:solidFill>
+                <a:latin typeface="Arial" pitchFamily="34" charset="0"/>
+                <a:ea typeface="Arial" pitchFamily="34" charset="-122"/>
+                <a:cs typeface="Arial" pitchFamily="34" charset="-120"/>
+              </a:rPr>
+              <a:t>Religion: </a:t>
+            </a:r>
+            <a:r>
+              <a:rPr lang="en-US" sz="2000" dirty="0">
+                <a:solidFill>
+                  <a:srgbClr val="000000"/>
+                </a:solidFill>
+                <a:latin typeface="Arial" pitchFamily="34" charset="0"/>
+                <a:ea typeface="Arial" pitchFamily="34" charset="-122"/>
+                <a:cs typeface="Arial" pitchFamily="34" charset="-120"/>
+              </a:rPr>
+              <a:t>James says a man can practice the form; deceive his heart </a:t>
+            </a:r>
+            <a:r>
+              <a:rPr lang="en-US" sz="2000" dirty="0">
+                <a:solidFill>
+                  <a:srgbClr val="000000"/>
+                </a:solidFill>
+                <a:latin typeface="Arial" pitchFamily="34" charset="0"/>
+                <a:ea typeface="Arial" pitchFamily="34" charset="-122"/>
+                <a:cs typeface="Arial" pitchFamily="34" charset="-120"/>
+                <a:sym typeface="Wingdings" pitchFamily="2" charset="2"/>
+              </a:rPr>
+              <a:t></a:t>
+            </a:r>
+            <a:r>
+              <a:rPr lang="en-US" sz="2000" dirty="0">
+                <a:solidFill>
+                  <a:srgbClr val="000000"/>
+                </a:solidFill>
+                <a:latin typeface="Arial" pitchFamily="34" charset="0"/>
+                <a:ea typeface="Arial" pitchFamily="34" charset="-122"/>
+                <a:cs typeface="Arial" pitchFamily="34" charset="-120"/>
+              </a:rPr>
+              <a:t> </a:t>
+            </a:r>
+            <a:r>
+              <a:rPr lang="en-US" sz="2000" i="1" dirty="0">
+                <a:solidFill>
+                  <a:srgbClr val="000000"/>
+                </a:solidFill>
+                <a:latin typeface="Arial" pitchFamily="34" charset="0"/>
+                <a:ea typeface="Arial" pitchFamily="34" charset="-122"/>
+                <a:cs typeface="Arial" pitchFamily="34" charset="-120"/>
+              </a:rPr>
+              <a:t>“futile” </a:t>
+            </a:r>
+          </a:p>
+          <a:p>
+            <a:pPr marL="0" indent="0" algn="l">
+              <a:buNone/>
+            </a:pPr>
+            <a:r>
+              <a:rPr lang="en-US" sz="2000" dirty="0">
+                <a:solidFill>
+                  <a:srgbClr val="000000"/>
+                </a:solidFill>
+                <a:latin typeface="Arial" pitchFamily="34" charset="0"/>
+                <a:ea typeface="Arial" pitchFamily="34" charset="-122"/>
+                <a:cs typeface="Arial" pitchFamily="34" charset="-120"/>
+              </a:rPr>
+              <a:t>(</a:t>
+            </a:r>
+            <a:r>
+              <a:rPr lang="en-US" sz="2000" b="1" dirty="0">
+                <a:solidFill>
+                  <a:srgbClr val="000000"/>
+                </a:solidFill>
+                <a:latin typeface="Arial" pitchFamily="34" charset="0"/>
+                <a:ea typeface="Arial" pitchFamily="34" charset="-122"/>
+                <a:cs typeface="Arial" pitchFamily="34" charset="-120"/>
+              </a:rPr>
+              <a:t>James 1:26</a:t>
+            </a:r>
+            <a:r>
+              <a:rPr lang="en-US" sz="2000" dirty="0">
+                <a:solidFill>
+                  <a:srgbClr val="000000"/>
+                </a:solidFill>
+                <a:latin typeface="Arial" pitchFamily="34" charset="0"/>
+                <a:ea typeface="Arial" pitchFamily="34" charset="-122"/>
+                <a:cs typeface="Arial" pitchFamily="34" charset="-120"/>
+              </a:rPr>
+              <a:t>).   Alone, it proves nothing.</a:t>
+            </a:r>
+            <a:endParaRPr lang="en-US" sz="2000" dirty="0"/>
+          </a:p>
+        </p:txBody>
+      </p:sp>
+      <p:sp>
+        <p:nvSpPr>
+          <p:cNvPr id="7" name="L2box"/>
+          <p:cNvSpPr/>
+          <p:nvPr/>
+        </p:nvSpPr>
+        <p:spPr>
+          <a:xfrm>
+            <a:off x="457200" y="3580397"/>
+            <a:ext cx="3200400" cy="1024128"/>
+          </a:xfrm>
+          <a:prstGeom prst="roundRect">
+            <a:avLst>
+              <a:gd name="adj" fmla="val 7143"/>
+            </a:avLst>
+          </a:prstGeom>
+          <a:solidFill>
+            <a:srgbClr val="1F497D"/>
+          </a:solidFill>
+          <a:ln w="12700">
+            <a:solidFill>
+              <a:srgbClr val="1F497D"/>
+            </a:solidFill>
+            <a:prstDash val="solid"/>
+          </a:ln>
+        </p:spPr>
+        <p:txBody>
+          <a:bodyPr/>
+          <a:lstStyle/>
+          <a:p>
+            <a:endParaRPr lang="en-US"/>
+          </a:p>
+        </p:txBody>
+      </p:sp>
+      <p:sp>
+        <p:nvSpPr>
+          <p:cNvPr id="8" name="L2lbl"/>
+          <p:cNvSpPr txBox="1"/>
+          <p:nvPr/>
+        </p:nvSpPr>
+        <p:spPr>
+          <a:xfrm>
+            <a:off x="457200" y="3699269"/>
+            <a:ext cx="3200400" cy="822960"/>
+          </a:xfrm>
+          <a:prstGeom prst="rect">
+            <a:avLst/>
+          </a:prstGeom>
+          <a:noFill/>
+          <a:ln/>
+        </p:spPr>
+        <p:txBody>
+          <a:bodyPr wrap="square" lIns="0" tIns="0" rIns="0" bIns="0" rtlCol="0" anchor="t"/>
+          <a:lstStyle/>
+          <a:p>
+            <a:pPr marL="0" indent="0" algn="ctr">
+              <a:buNone/>
+            </a:pPr>
+            <a:r>
+              <a:rPr lang="en-US" sz="2000" b="1" dirty="0">
+                <a:solidFill>
+                  <a:srgbClr val="FFFFFF"/>
+                </a:solidFill>
+                <a:latin typeface="Arial" pitchFamily="34" charset="0"/>
+                <a:ea typeface="Arial" pitchFamily="34" charset="-122"/>
+                <a:cs typeface="Arial" pitchFamily="34" charset="-120"/>
+              </a:rPr>
+              <a:t>2. Worship</a:t>
+            </a:r>
+            <a:endParaRPr lang="en-US" dirty="0"/>
+          </a:p>
+          <a:p>
+            <a:pPr marL="0" indent="0" algn="ctr">
+              <a:buNone/>
+            </a:pPr>
+            <a:r>
+              <a:rPr lang="en-US" sz="2000" dirty="0">
+                <a:solidFill>
+                  <a:srgbClr val="FFFFFF"/>
+                </a:solidFill>
+                <a:latin typeface="Arial" pitchFamily="34" charset="0"/>
+                <a:ea typeface="Arial" pitchFamily="34" charset="-122"/>
+                <a:cs typeface="Arial" pitchFamily="34" charset="-120"/>
+              </a:rPr>
+              <a:t>the DISPOSITION </a:t>
+            </a:r>
+            <a:r>
+              <a:rPr lang="en-US" sz="2000" dirty="0">
+                <a:solidFill>
+                  <a:srgbClr val="FFFFFF"/>
+                </a:solidFill>
+                <a:latin typeface="Arial" pitchFamily="34" charset="0"/>
+                <a:ea typeface="Arial" pitchFamily="34" charset="-122"/>
+                <a:cs typeface="Arial" pitchFamily="34" charset="-120"/>
+                <a:sym typeface="Wingdings" pitchFamily="2" charset="2"/>
+              </a:rPr>
+              <a:t></a:t>
+            </a:r>
+            <a:r>
+              <a:rPr lang="en-US" sz="2000" dirty="0">
+                <a:solidFill>
+                  <a:srgbClr val="FFFFFF"/>
+                </a:solidFill>
+                <a:latin typeface="Arial" pitchFamily="34" charset="0"/>
+                <a:ea typeface="Arial" pitchFamily="34" charset="-122"/>
+                <a:cs typeface="Arial" pitchFamily="34" charset="-120"/>
+              </a:rPr>
+              <a:t> the heart aimed at God</a:t>
+            </a:r>
+            <a:endParaRPr lang="en-US" sz="2000" dirty="0"/>
+          </a:p>
+        </p:txBody>
+      </p:sp>
+      <p:sp>
+        <p:nvSpPr>
+          <p:cNvPr id="9" name="L2txt"/>
+          <p:cNvSpPr txBox="1"/>
+          <p:nvPr/>
+        </p:nvSpPr>
+        <p:spPr>
+          <a:xfrm>
+            <a:off x="3931920" y="3598685"/>
+            <a:ext cx="4983480" cy="1051560"/>
+          </a:xfrm>
+          <a:prstGeom prst="rect">
+            <a:avLst/>
+          </a:prstGeom>
+          <a:noFill/>
+          <a:ln/>
+        </p:spPr>
+        <p:txBody>
+          <a:bodyPr wrap="square" lIns="0" tIns="0" rIns="0" bIns="0" rtlCol="0" anchor="ctr"/>
+          <a:lstStyle/>
+          <a:p>
+            <a:pPr marL="0" indent="0" algn="l">
+              <a:buNone/>
+            </a:pPr>
+            <a:r>
+              <a:rPr lang="en-US" sz="2000" b="1" dirty="0">
+                <a:solidFill>
+                  <a:srgbClr val="1F497D"/>
+                </a:solidFill>
+                <a:latin typeface="Arial" pitchFamily="34" charset="0"/>
+                <a:ea typeface="Arial" pitchFamily="34" charset="-122"/>
+                <a:cs typeface="Arial" pitchFamily="34" charset="-120"/>
+              </a:rPr>
+              <a:t>Worship: </a:t>
+            </a:r>
+            <a:r>
+              <a:rPr lang="en-US" sz="2000" i="1" dirty="0">
+                <a:solidFill>
+                  <a:srgbClr val="000000"/>
+                </a:solidFill>
+                <a:latin typeface="Arial" pitchFamily="34" charset="0"/>
+                <a:ea typeface="Arial" pitchFamily="34" charset="-122"/>
+                <a:cs typeface="Arial" pitchFamily="34" charset="-120"/>
+              </a:rPr>
+              <a:t>“In spirit and truth”</a:t>
+            </a:r>
+            <a:r>
+              <a:rPr lang="en-US" sz="2000" dirty="0">
+                <a:solidFill>
+                  <a:srgbClr val="000000"/>
+                </a:solidFill>
+                <a:latin typeface="Arial" pitchFamily="34" charset="0"/>
+                <a:ea typeface="Arial" pitchFamily="34" charset="-122"/>
+                <a:cs typeface="Arial" pitchFamily="34" charset="-120"/>
+              </a:rPr>
+              <a:t> (</a:t>
+            </a:r>
+            <a:r>
+              <a:rPr lang="en-US" sz="2000" b="1" dirty="0">
+                <a:solidFill>
+                  <a:srgbClr val="000000"/>
+                </a:solidFill>
+                <a:latin typeface="Arial" pitchFamily="34" charset="0"/>
+                <a:ea typeface="Arial" pitchFamily="34" charset="-122"/>
+                <a:cs typeface="Arial" pitchFamily="34" charset="-120"/>
+              </a:rPr>
+              <a:t>John 4:23–24</a:t>
+            </a:r>
+            <a:r>
+              <a:rPr lang="en-US" sz="2000" dirty="0">
+                <a:solidFill>
+                  <a:srgbClr val="000000"/>
+                </a:solidFill>
+                <a:latin typeface="Arial" pitchFamily="34" charset="0"/>
+                <a:ea typeface="Arial" pitchFamily="34" charset="-122"/>
+                <a:cs typeface="Arial" pitchFamily="34" charset="-120"/>
+              </a:rPr>
+              <a:t>). But a disposition is invisible </a:t>
+            </a:r>
+            <a:r>
+              <a:rPr lang="en-US" sz="2000" dirty="0">
+                <a:solidFill>
+                  <a:srgbClr val="000000"/>
+                </a:solidFill>
+                <a:latin typeface="Arial" pitchFamily="34" charset="0"/>
+                <a:ea typeface="Arial" pitchFamily="34" charset="-122"/>
+                <a:cs typeface="Arial" pitchFamily="34" charset="-120"/>
+                <a:sym typeface="Wingdings" pitchFamily="2" charset="2"/>
+              </a:rPr>
+              <a:t></a:t>
+            </a:r>
+            <a:r>
+              <a:rPr lang="en-US" sz="2000" dirty="0">
+                <a:solidFill>
+                  <a:srgbClr val="000000"/>
+                </a:solidFill>
+                <a:latin typeface="Arial" pitchFamily="34" charset="0"/>
+                <a:ea typeface="Arial" pitchFamily="34" charset="-122"/>
+                <a:cs typeface="Arial" pitchFamily="34" charset="-120"/>
+              </a:rPr>
+              <a:t> even to its owner.</a:t>
+            </a:r>
+            <a:endParaRPr lang="en-US" sz="2000" dirty="0"/>
+          </a:p>
+        </p:txBody>
+      </p:sp>
+      <p:sp>
+        <p:nvSpPr>
+          <p:cNvPr id="10" name="L3box"/>
+          <p:cNvSpPr/>
+          <p:nvPr/>
+        </p:nvSpPr>
+        <p:spPr>
+          <a:xfrm>
+            <a:off x="457200" y="2409965"/>
+            <a:ext cx="3200400" cy="1024128"/>
+          </a:xfrm>
+          <a:prstGeom prst="roundRect">
+            <a:avLst>
+              <a:gd name="adj" fmla="val 7143"/>
+            </a:avLst>
+          </a:prstGeom>
+          <a:solidFill>
+            <a:srgbClr val="1F497D"/>
+          </a:solidFill>
+          <a:ln w="12700">
+            <a:solidFill>
+              <a:srgbClr val="1F497D"/>
+            </a:solidFill>
+            <a:prstDash val="solid"/>
+          </a:ln>
+        </p:spPr>
+        <p:txBody>
+          <a:bodyPr/>
+          <a:lstStyle/>
+          <a:p>
+            <a:endParaRPr lang="en-US"/>
+          </a:p>
+        </p:txBody>
+      </p:sp>
+      <p:sp>
+        <p:nvSpPr>
+          <p:cNvPr id="11" name="L3lbl"/>
+          <p:cNvSpPr txBox="1"/>
+          <p:nvPr/>
+        </p:nvSpPr>
+        <p:spPr>
+          <a:xfrm>
+            <a:off x="457200" y="2528837"/>
+            <a:ext cx="3200400" cy="822960"/>
+          </a:xfrm>
+          <a:prstGeom prst="rect">
+            <a:avLst/>
+          </a:prstGeom>
+          <a:noFill/>
+          <a:ln/>
+        </p:spPr>
+        <p:txBody>
+          <a:bodyPr wrap="square" lIns="0" tIns="0" rIns="0" bIns="0" rtlCol="0" anchor="t"/>
+          <a:lstStyle/>
+          <a:p>
+            <a:pPr marL="0" indent="0" algn="ctr">
+              <a:buNone/>
+            </a:pPr>
+            <a:r>
+              <a:rPr lang="en-US" sz="2000" b="1" dirty="0">
+                <a:solidFill>
+                  <a:srgbClr val="FFFFFF"/>
+                </a:solidFill>
+                <a:latin typeface="Arial" pitchFamily="34" charset="0"/>
+                <a:ea typeface="Arial" pitchFamily="34" charset="-122"/>
+                <a:cs typeface="Arial" pitchFamily="34" charset="-120"/>
+              </a:rPr>
+              <a:t>3. Sacrifice</a:t>
+            </a:r>
+            <a:endParaRPr lang="en-US" dirty="0"/>
+          </a:p>
+          <a:p>
+            <a:pPr marL="0" indent="0" algn="ctr">
+              <a:buNone/>
+            </a:pPr>
+            <a:r>
+              <a:rPr lang="en-US" sz="2000" dirty="0">
+                <a:solidFill>
+                  <a:srgbClr val="FFFFFF"/>
+                </a:solidFill>
+                <a:latin typeface="Arial" pitchFamily="34" charset="0"/>
+                <a:ea typeface="Arial" pitchFamily="34" charset="-122"/>
+                <a:cs typeface="Arial" pitchFamily="34" charset="-120"/>
+              </a:rPr>
+              <a:t>the COST </a:t>
+            </a:r>
+            <a:r>
+              <a:rPr lang="en-US" sz="2000" dirty="0">
+                <a:solidFill>
+                  <a:srgbClr val="FFFFFF"/>
+                </a:solidFill>
+                <a:latin typeface="Arial" pitchFamily="34" charset="0"/>
+                <a:ea typeface="Arial" pitchFamily="34" charset="-122"/>
+                <a:cs typeface="Arial" pitchFamily="34" charset="-120"/>
+                <a:sym typeface="Wingdings" pitchFamily="2" charset="2"/>
+              </a:rPr>
+              <a:t></a:t>
+            </a:r>
+            <a:r>
+              <a:rPr lang="en-US" sz="2000" dirty="0">
+                <a:solidFill>
+                  <a:srgbClr val="FFFFFF"/>
+                </a:solidFill>
+                <a:latin typeface="Arial" pitchFamily="34" charset="0"/>
+                <a:ea typeface="Arial" pitchFamily="34" charset="-122"/>
+                <a:cs typeface="Arial" pitchFamily="34" charset="-120"/>
+              </a:rPr>
+              <a:t> the disposition made visible</a:t>
+            </a:r>
+            <a:endParaRPr lang="en-US" sz="2000" dirty="0"/>
+          </a:p>
+        </p:txBody>
+      </p:sp>
+      <p:sp>
+        <p:nvSpPr>
+          <p:cNvPr id="12" name="L3txt"/>
+          <p:cNvSpPr txBox="1"/>
+          <p:nvPr/>
+        </p:nvSpPr>
+        <p:spPr>
+          <a:xfrm>
+            <a:off x="3931920" y="2428253"/>
+            <a:ext cx="4983480" cy="1051560"/>
+          </a:xfrm>
+          <a:prstGeom prst="rect">
+            <a:avLst/>
+          </a:prstGeom>
+          <a:noFill/>
+          <a:ln/>
+        </p:spPr>
+        <p:txBody>
+          <a:bodyPr wrap="square" lIns="0" tIns="0" rIns="0" bIns="0" rtlCol="0" anchor="ctr"/>
+          <a:lstStyle/>
+          <a:p>
+            <a:pPr marL="0" indent="0" algn="l">
+              <a:buNone/>
+            </a:pPr>
+            <a:r>
+              <a:rPr lang="en-US" sz="2000" b="1" dirty="0">
+                <a:solidFill>
+                  <a:srgbClr val="1F497D"/>
+                </a:solidFill>
+                <a:latin typeface="Arial" pitchFamily="34" charset="0"/>
+                <a:ea typeface="Arial" pitchFamily="34" charset="-122"/>
+                <a:cs typeface="Arial" pitchFamily="34" charset="-120"/>
+              </a:rPr>
+              <a:t>Sacrifice: </a:t>
+            </a:r>
+            <a:r>
+              <a:rPr lang="en-US" sz="2000" i="1" dirty="0">
+                <a:solidFill>
+                  <a:srgbClr val="000000"/>
+                </a:solidFill>
+                <a:latin typeface="Arial" pitchFamily="34" charset="0"/>
+                <a:ea typeface="Arial" pitchFamily="34" charset="-122"/>
+                <a:cs typeface="Arial" pitchFamily="34" charset="-120"/>
+              </a:rPr>
+              <a:t>“Take your son </a:t>
+            </a:r>
+            <a:r>
+              <a:rPr lang="en-US" sz="2000" i="1" dirty="0">
+                <a:solidFill>
+                  <a:srgbClr val="000000"/>
+                </a:solidFill>
+                <a:latin typeface="Arial" pitchFamily="34" charset="0"/>
+                <a:ea typeface="Arial" pitchFamily="34" charset="-122"/>
+                <a:cs typeface="Arial" pitchFamily="34" charset="-120"/>
+                <a:sym typeface="Wingdings" pitchFamily="2" charset="2"/>
+              </a:rPr>
+              <a:t></a:t>
+            </a:r>
+            <a:r>
+              <a:rPr lang="en-US" sz="2000" i="1" dirty="0">
+                <a:solidFill>
+                  <a:srgbClr val="000000"/>
+                </a:solidFill>
+                <a:latin typeface="Arial" pitchFamily="34" charset="0"/>
+                <a:ea typeface="Arial" pitchFamily="34" charset="-122"/>
+                <a:cs typeface="Arial" pitchFamily="34" charset="-120"/>
+              </a:rPr>
+              <a:t> your only son, whom you love” </a:t>
+            </a:r>
+            <a:r>
+              <a:rPr lang="en-US" sz="2000" dirty="0">
+                <a:solidFill>
+                  <a:srgbClr val="000000"/>
+                </a:solidFill>
+                <a:latin typeface="Arial" pitchFamily="34" charset="0"/>
+                <a:ea typeface="Arial" pitchFamily="34" charset="-122"/>
+                <a:cs typeface="Arial" pitchFamily="34" charset="-120"/>
+              </a:rPr>
+              <a:t>(</a:t>
+            </a:r>
+            <a:r>
+              <a:rPr lang="en-US" sz="2000" b="1" dirty="0">
+                <a:solidFill>
+                  <a:srgbClr val="000000"/>
+                </a:solidFill>
+                <a:latin typeface="Arial" pitchFamily="34" charset="0"/>
+                <a:ea typeface="Arial" pitchFamily="34" charset="-122"/>
+                <a:cs typeface="Arial" pitchFamily="34" charset="-120"/>
+              </a:rPr>
+              <a:t>Gen 22:2</a:t>
+            </a:r>
+            <a:r>
+              <a:rPr lang="en-US" sz="2000" dirty="0">
+                <a:solidFill>
+                  <a:srgbClr val="000000"/>
+                </a:solidFill>
+                <a:latin typeface="Arial" pitchFamily="34" charset="0"/>
+                <a:ea typeface="Arial" pitchFamily="34" charset="-122"/>
+                <a:cs typeface="Arial" pitchFamily="34" charset="-120"/>
+              </a:rPr>
+              <a:t>). Faith became visible at the raised knife (</a:t>
+            </a:r>
+            <a:r>
+              <a:rPr lang="en-US" sz="2000" b="1" dirty="0">
+                <a:solidFill>
+                  <a:srgbClr val="000000"/>
+                </a:solidFill>
+                <a:latin typeface="Arial" pitchFamily="34" charset="0"/>
+                <a:ea typeface="Arial" pitchFamily="34" charset="-122"/>
+                <a:cs typeface="Arial" pitchFamily="34" charset="-120"/>
+              </a:rPr>
+              <a:t>Heb 11:17–19</a:t>
+            </a:r>
+            <a:r>
+              <a:rPr lang="en-US" sz="2000" dirty="0">
+                <a:solidFill>
+                  <a:srgbClr val="000000"/>
+                </a:solidFill>
+                <a:latin typeface="Arial" pitchFamily="34" charset="0"/>
+                <a:ea typeface="Arial" pitchFamily="34" charset="-122"/>
+                <a:cs typeface="Arial" pitchFamily="34" charset="-120"/>
+              </a:rPr>
+              <a:t>).</a:t>
+            </a:r>
+            <a:endParaRPr lang="en-US" sz="2000" dirty="0"/>
+          </a:p>
+        </p:txBody>
+      </p:sp>
+      <p:sp>
+        <p:nvSpPr>
+          <p:cNvPr id="13" name="L4box"/>
+          <p:cNvSpPr/>
+          <p:nvPr/>
+        </p:nvSpPr>
+        <p:spPr>
+          <a:xfrm>
+            <a:off x="457200" y="1239533"/>
+            <a:ext cx="3200400" cy="1024128"/>
+          </a:xfrm>
+          <a:prstGeom prst="roundRect">
+            <a:avLst>
+              <a:gd name="adj" fmla="val 7143"/>
+            </a:avLst>
+          </a:prstGeom>
+          <a:solidFill>
+            <a:srgbClr val="1F497D"/>
+          </a:solidFill>
+          <a:ln w="12700">
+            <a:solidFill>
+              <a:srgbClr val="1F497D"/>
+            </a:solidFill>
+            <a:prstDash val="solid"/>
+          </a:ln>
+        </p:spPr>
+        <p:txBody>
+          <a:bodyPr/>
+          <a:lstStyle/>
+          <a:p>
+            <a:endParaRPr lang="en-US"/>
+          </a:p>
+        </p:txBody>
+      </p:sp>
+      <p:sp>
+        <p:nvSpPr>
+          <p:cNvPr id="14" name="L4lbl"/>
+          <p:cNvSpPr txBox="1"/>
+          <p:nvPr/>
+        </p:nvSpPr>
+        <p:spPr>
+          <a:xfrm>
+            <a:off x="457200" y="1358405"/>
+            <a:ext cx="3200400" cy="822960"/>
+          </a:xfrm>
+          <a:prstGeom prst="rect">
+            <a:avLst/>
+          </a:prstGeom>
+          <a:noFill/>
+          <a:ln/>
+        </p:spPr>
+        <p:txBody>
+          <a:bodyPr wrap="square" lIns="0" tIns="0" rIns="0" bIns="0" rtlCol="0" anchor="t"/>
+          <a:lstStyle/>
+          <a:p>
+            <a:pPr marL="0" indent="0" algn="ctr">
+              <a:buNone/>
+            </a:pPr>
+            <a:r>
+              <a:rPr lang="en-US" sz="2000" b="1" dirty="0">
+                <a:solidFill>
+                  <a:srgbClr val="FFFFFF"/>
+                </a:solidFill>
+                <a:latin typeface="Arial" pitchFamily="34" charset="0"/>
+                <a:ea typeface="Arial" pitchFamily="34" charset="-122"/>
+                <a:cs typeface="Arial" pitchFamily="34" charset="-120"/>
+              </a:rPr>
+              <a:t>4. Obedience of Faith</a:t>
+            </a:r>
+            <a:endParaRPr lang="en-US" dirty="0"/>
+          </a:p>
+          <a:p>
+            <a:pPr marL="0" indent="0" algn="ctr">
+              <a:buNone/>
+            </a:pPr>
+            <a:r>
+              <a:rPr lang="en-US" sz="2000" dirty="0">
+                <a:solidFill>
+                  <a:srgbClr val="FFFFFF"/>
+                </a:solidFill>
+                <a:latin typeface="Arial" pitchFamily="34" charset="0"/>
+                <a:ea typeface="Arial" pitchFamily="34" charset="-122"/>
+                <a:cs typeface="Arial" pitchFamily="34" charset="-120"/>
+              </a:rPr>
+              <a:t>the SETTLED PATTERN (Romans 1:5; 16:26)</a:t>
+            </a:r>
+            <a:endParaRPr lang="en-US" sz="2000" dirty="0"/>
+          </a:p>
+        </p:txBody>
+      </p:sp>
+      <p:sp>
+        <p:nvSpPr>
+          <p:cNvPr id="15" name="L4txt"/>
+          <p:cNvSpPr txBox="1"/>
+          <p:nvPr/>
+        </p:nvSpPr>
+        <p:spPr>
+          <a:xfrm>
+            <a:off x="3931920" y="1257821"/>
+            <a:ext cx="4983480" cy="1051560"/>
+          </a:xfrm>
+          <a:prstGeom prst="rect">
+            <a:avLst/>
+          </a:prstGeom>
+          <a:noFill/>
+          <a:ln/>
+        </p:spPr>
+        <p:txBody>
+          <a:bodyPr wrap="square" lIns="0" tIns="0" rIns="0" bIns="0" rtlCol="0" anchor="ctr"/>
+          <a:lstStyle/>
+          <a:p>
+            <a:pPr marL="0" indent="0" algn="l">
+              <a:buNone/>
+            </a:pPr>
+            <a:r>
+              <a:rPr lang="en-US" sz="2000" b="1" dirty="0">
+                <a:solidFill>
+                  <a:srgbClr val="1F497D"/>
+                </a:solidFill>
+                <a:latin typeface="Arial" pitchFamily="34" charset="0"/>
+                <a:ea typeface="Arial" pitchFamily="34" charset="-122"/>
+                <a:cs typeface="Arial" pitchFamily="34" charset="-120"/>
+              </a:rPr>
+              <a:t>Obedience of Faith: </a:t>
+            </a:r>
+            <a:r>
+              <a:rPr lang="en-US" sz="2000" dirty="0">
+                <a:solidFill>
+                  <a:srgbClr val="000000"/>
+                </a:solidFill>
+                <a:latin typeface="Arial" pitchFamily="34" charset="0"/>
+                <a:ea typeface="Arial" pitchFamily="34" charset="-122"/>
+                <a:cs typeface="Arial" pitchFamily="34" charset="-120"/>
+              </a:rPr>
+              <a:t>The whole gospel stack aligned </a:t>
+            </a:r>
+            <a:r>
+              <a:rPr lang="en-US" sz="2000" dirty="0">
+                <a:solidFill>
+                  <a:srgbClr val="000000"/>
+                </a:solidFill>
+                <a:latin typeface="Arial" pitchFamily="34" charset="0"/>
+                <a:ea typeface="Arial" pitchFamily="34" charset="-122"/>
+                <a:cs typeface="Arial" pitchFamily="34" charset="-120"/>
+                <a:sym typeface="Wingdings" pitchFamily="2" charset="2"/>
+              </a:rPr>
+              <a:t></a:t>
+            </a:r>
+            <a:r>
+              <a:rPr lang="en-US" sz="2000" dirty="0">
+                <a:solidFill>
+                  <a:srgbClr val="000000"/>
+                </a:solidFill>
+                <a:latin typeface="Arial" pitchFamily="34" charset="0"/>
+                <a:ea typeface="Arial" pitchFamily="34" charset="-122"/>
+                <a:cs typeface="Arial" pitchFamily="34" charset="-120"/>
+              </a:rPr>
+              <a:t> a life reorganized around what it claims. Not one dramatic act.</a:t>
+            </a:r>
+            <a:endParaRPr lang="en-US" sz="2000" dirty="0"/>
+          </a:p>
+        </p:txBody>
+      </p:sp>
+    </p:spTree>
+  </p:cSld>
+  <p:clrMapOvr>
+    <a:masterClrMapping/>
+  </p:clrMapOvr>
+  <p:timing>
+    <p:tnLst>
+      <p:par>
+        <p:cTn id="1" dur="indefinite" restart="never" nodeType="tmRoot">
+          <p:childTnLst>
+            <p:seq concurrent="1" nextAc="seek">
+              <p:cTn id="2" dur="indefinite" nodeType="mainSeq">
+                <p:childTnLst>
+                  <p:par>
+                    <p:cTn id="3" fill="hold">
+                      <p:stCondLst>
+                        <p:cond delay="indefinite"/>
+                      </p:stCondLst>
+                      <p:childTnLst>
+                        <p:par>
+                          <p:cTn id="4" fill="hold">
+                            <p:stCondLst>
+                              <p:cond delay="0"/>
+                            </p:stCondLst>
+                            <p:childTnLst>
+                              <p:par>
+                                <p:cTn id="5" presetID="42" presetClass="entr" presetSubtype="0" fill="hold" nodeType="clickEffect">
+                                  <p:stCondLst>
+                                    <p:cond delay="0"/>
+                                  </p:stCondLst>
+                                  <p:childTnLst>
+                                    <p:set>
+                                      <p:cBhvr>
+                                        <p:cTn id="6" dur="1" fill="hold">
+                                          <p:stCondLst>
+                                            <p:cond delay="0"/>
+                                          </p:stCondLst>
+                                        </p:cTn>
+                                        <p:tgtEl>
+                                          <p:spTgt spid="4"/>
+                                        </p:tgtEl>
+                                        <p:attrNameLst>
+                                          <p:attrName>style.visibility</p:attrName>
+                                        </p:attrNameLst>
+                                      </p:cBhvr>
+                                      <p:to>
+                                        <p:strVal val="visible"/>
+                                      </p:to>
+                                    </p:set>
+                                    <p:animEffect transition="in" filter="fade">
+                                      <p:cBhvr>
+                                        <p:cTn id="7" dur="1000"/>
+                                        <p:tgtEl>
+                                          <p:spTgt spid="4"/>
+                                        </p:tgtEl>
+                                      </p:cBhvr>
+                                    </p:animEffect>
+                                    <p:anim calcmode="lin" valueType="num">
+                                      <p:cBhvr>
+                                        <p:cTn id="8" dur="1000" fill="hold"/>
+                                        <p:tgtEl>
+                                          <p:spTgt spid="4"/>
+                                        </p:tgtEl>
+                                        <p:attrNameLst>
+                                          <p:attrName>ppt_y</p:attrName>
+                                        </p:attrNameLst>
+                                      </p:cBhvr>
+                                      <p:tavLst>
+                                        <p:tav tm="0">
+                                          <p:val>
+                                            <p:strVal val="#ppt_y+.1"/>
+                                          </p:val>
+                                        </p:tav>
+                                        <p:tav tm="100000">
+                                          <p:val>
+                                            <p:strVal val="#ppt_y"/>
+                                          </p:val>
+                                        </p:tav>
+                                      </p:tavLst>
+                                    </p:anim>
+                                  </p:childTnLst>
+                                </p:cTn>
+                              </p:par>
+                              <p:par>
+                                <p:cTn id="9" presetID="42" presetClass="entr" presetSubtype="0" fill="hold" nodeType="withEffect">
+                                  <p:stCondLst>
+                                    <p:cond delay="0"/>
+                                  </p:stCondLst>
+                                  <p:childTnLst>
+                                    <p:set>
+                                      <p:cBhvr>
+                                        <p:cTn id="10" dur="1" fill="hold">
+                                          <p:stCondLst>
+                                            <p:cond delay="0"/>
+                                          </p:stCondLst>
+                                        </p:cTn>
+                                        <p:tgtEl>
+                                          <p:spTgt spid="5"/>
+                                        </p:tgtEl>
+                                        <p:attrNameLst>
+                                          <p:attrName>style.visibility</p:attrName>
+                                        </p:attrNameLst>
+                                      </p:cBhvr>
+                                      <p:to>
+                                        <p:strVal val="visible"/>
+                                      </p:to>
+                                    </p:set>
+                                    <p:animEffect transition="in" filter="fade">
+                                      <p:cBhvr>
+                                        <p:cTn id="11" dur="1000"/>
+                                        <p:tgtEl>
+                                          <p:spTgt spid="5"/>
+                                        </p:tgtEl>
+                                      </p:cBhvr>
+                                    </p:animEffect>
+                                    <p:anim calcmode="lin" valueType="num">
+                                      <p:cBhvr>
+                                        <p:cTn id="12" dur="1000" fill="hold"/>
+                                        <p:tgtEl>
+                                          <p:spTgt spid="5"/>
+                                        </p:tgtEl>
+                                        <p:attrNameLst>
+                                          <p:attrName>ppt_y</p:attrName>
+                                        </p:attrNameLst>
+                                      </p:cBhvr>
+                                      <p:tavLst>
+                                        <p:tav tm="0">
+                                          <p:val>
+                                            <p:strVal val="#ppt_y+.1"/>
+                                          </p:val>
+                                        </p:tav>
+                                        <p:tav tm="100000">
+                                          <p:val>
+                                            <p:strVal val="#ppt_y"/>
+                                          </p:val>
+                                        </p:tav>
+                                      </p:tavLst>
+                                    </p:anim>
+                                  </p:childTnLst>
+                                </p:cTn>
+                              </p:par>
+                              <p:par>
+                                <p:cTn id="13" presetID="42" presetClass="entr" presetSubtype="0" fill="hold" nodeType="withEffect">
+                                  <p:stCondLst>
+                                    <p:cond delay="0"/>
+                                  </p:stCondLst>
+                                  <p:childTnLst>
+                                    <p:set>
+                                      <p:cBhvr>
+                                        <p:cTn id="14" dur="1" fill="hold">
+                                          <p:stCondLst>
+                                            <p:cond delay="0"/>
+                                          </p:stCondLst>
+                                        </p:cTn>
+                                        <p:tgtEl>
+                                          <p:spTgt spid="6"/>
+                                        </p:tgtEl>
+                                        <p:attrNameLst>
+                                          <p:attrName>style.visibility</p:attrName>
+                                        </p:attrNameLst>
+                                      </p:cBhvr>
+                                      <p:to>
+                                        <p:strVal val="visible"/>
+                                      </p:to>
+                                    </p:set>
+                                    <p:animEffect transition="in" filter="fade">
+                                      <p:cBhvr>
+                                        <p:cTn id="15" dur="1000"/>
+                                        <p:tgtEl>
+                                          <p:spTgt spid="6"/>
+                                        </p:tgtEl>
+                                      </p:cBhvr>
+                                    </p:animEffect>
+                                    <p:anim calcmode="lin" valueType="num">
+                                      <p:cBhvr>
+                                        <p:cTn id="16" dur="1000" fill="hold"/>
+                                        <p:tgtEl>
+                                          <p:spTgt spid="6"/>
+                                        </p:tgtEl>
+                                        <p:attrNameLst>
+                                          <p:attrName>ppt_y</p:attrName>
+                                        </p:attrNameLst>
+                                      </p:cBhvr>
+                                      <p:tavLst>
+                                        <p:tav tm="0">
+                                          <p:val>
+                                            <p:strVal val="#ppt_y+.1"/>
+                                          </p:val>
+                                        </p:tav>
+                                        <p:tav tm="100000">
+                                          <p:val>
+                                            <p:strVal val="#ppt_y"/>
+                                          </p:val>
+                                        </p:tav>
+                                      </p:tavLst>
+                                    </p:anim>
+                                  </p:childTnLst>
+                                </p:cTn>
+                              </p:par>
+                            </p:childTnLst>
+                          </p:cTn>
+                        </p:par>
+                      </p:childTnLst>
+                    </p:cTn>
+                  </p:par>
+                  <p:par>
+                    <p:cTn id="17" fill="hold">
+                      <p:stCondLst>
+                        <p:cond delay="indefinite"/>
+                      </p:stCondLst>
+                      <p:childTnLst>
+                        <p:par>
+                          <p:cTn id="18" fill="hold">
+                            <p:stCondLst>
+                              <p:cond delay="0"/>
+                            </p:stCondLst>
+                            <p:childTnLst>
+                              <p:par>
+                                <p:cTn id="19" presetID="42" presetClass="entr" presetSubtype="0" fill="hold" nodeType="clickEffect">
+                                  <p:stCondLst>
+                                    <p:cond delay="0"/>
+                                  </p:stCondLst>
+                                  <p:childTnLst>
+                                    <p:set>
+                                      <p:cBhvr>
+                                        <p:cTn id="20" dur="1" fill="hold">
+                                          <p:stCondLst>
+                                            <p:cond delay="0"/>
+                                          </p:stCondLst>
+                                        </p:cTn>
+                                        <p:tgtEl>
+                                          <p:spTgt spid="7"/>
+                                        </p:tgtEl>
+                                        <p:attrNameLst>
+                                          <p:attrName>style.visibility</p:attrName>
+                                        </p:attrNameLst>
+                                      </p:cBhvr>
+                                      <p:to>
+                                        <p:strVal val="visible"/>
+                                      </p:to>
+                                    </p:set>
+                                    <p:animEffect transition="in" filter="fade">
+                                      <p:cBhvr>
+                                        <p:cTn id="21" dur="1000"/>
+                                        <p:tgtEl>
+                                          <p:spTgt spid="7"/>
+                                        </p:tgtEl>
+                                      </p:cBhvr>
+                                    </p:animEffect>
+                                    <p:anim calcmode="lin" valueType="num">
+                                      <p:cBhvr>
+                                        <p:cTn id="22" dur="1000" fill="hold"/>
+                                        <p:tgtEl>
+                                          <p:spTgt spid="7"/>
+                                        </p:tgtEl>
+                                        <p:attrNameLst>
+                                          <p:attrName>ppt_y</p:attrName>
+                                        </p:attrNameLst>
+                                      </p:cBhvr>
+                                      <p:tavLst>
+                                        <p:tav tm="0">
+                                          <p:val>
+                                            <p:strVal val="#ppt_y+.1"/>
+                                          </p:val>
+                                        </p:tav>
+                                        <p:tav tm="100000">
+                                          <p:val>
+                                            <p:strVal val="#ppt_y"/>
+                                          </p:val>
+                                        </p:tav>
+                                      </p:tavLst>
+                                    </p:anim>
+                                  </p:childTnLst>
+                                </p:cTn>
+                              </p:par>
+                              <p:par>
+                                <p:cTn id="23" presetID="42" presetClass="entr" presetSubtype="0" fill="hold" nodeType="withEffect">
+                                  <p:stCondLst>
+                                    <p:cond delay="0"/>
+                                  </p:stCondLst>
+                                  <p:childTnLst>
+                                    <p:set>
+                                      <p:cBhvr>
+                                        <p:cTn id="24" dur="1" fill="hold">
+                                          <p:stCondLst>
+                                            <p:cond delay="0"/>
+                                          </p:stCondLst>
+                                        </p:cTn>
+                                        <p:tgtEl>
+                                          <p:spTgt spid="8"/>
+                                        </p:tgtEl>
+                                        <p:attrNameLst>
+                                          <p:attrName>style.visibility</p:attrName>
+                                        </p:attrNameLst>
+                                      </p:cBhvr>
+                                      <p:to>
+                                        <p:strVal val="visible"/>
+                                      </p:to>
+                                    </p:set>
+                                    <p:animEffect transition="in" filter="fade">
+                                      <p:cBhvr>
+                                        <p:cTn id="25" dur="1000"/>
+                                        <p:tgtEl>
+                                          <p:spTgt spid="8"/>
+                                        </p:tgtEl>
+                                      </p:cBhvr>
+                                    </p:animEffect>
+                                    <p:anim calcmode="lin" valueType="num">
+                                      <p:cBhvr>
+                                        <p:cTn id="26" dur="1000" fill="hold"/>
+                                        <p:tgtEl>
+                                          <p:spTgt spid="8"/>
+                                        </p:tgtEl>
+                                        <p:attrNameLst>
+                                          <p:attrName>ppt_y</p:attrName>
+                                        </p:attrNameLst>
+                                      </p:cBhvr>
+                                      <p:tavLst>
+                                        <p:tav tm="0">
+                                          <p:val>
+                                            <p:strVal val="#ppt_y+.1"/>
+                                          </p:val>
+                                        </p:tav>
+                                        <p:tav tm="100000">
+                                          <p:val>
+                                            <p:strVal val="#ppt_y"/>
+                                          </p:val>
+                                        </p:tav>
+                                      </p:tavLst>
+                                    </p:anim>
+                                  </p:childTnLst>
+                                </p:cTn>
+                              </p:par>
+                              <p:par>
+                                <p:cTn id="27" presetID="42" presetClass="entr" presetSubtype="0" fill="hold" nodeType="withEffect">
+                                  <p:stCondLst>
+                                    <p:cond delay="0"/>
+                                  </p:stCondLst>
+                                  <p:childTnLst>
+                                    <p:set>
+                                      <p:cBhvr>
+                                        <p:cTn id="28" dur="1" fill="hold">
+                                          <p:stCondLst>
+                                            <p:cond delay="0"/>
+                                          </p:stCondLst>
+                                        </p:cTn>
+                                        <p:tgtEl>
+                                          <p:spTgt spid="9"/>
+                                        </p:tgtEl>
+                                        <p:attrNameLst>
+                                          <p:attrName>style.visibility</p:attrName>
+                                        </p:attrNameLst>
+                                      </p:cBhvr>
+                                      <p:to>
+                                        <p:strVal val="visible"/>
+                                      </p:to>
+                                    </p:set>
+                                    <p:animEffect transition="in" filter="fade">
+                                      <p:cBhvr>
+                                        <p:cTn id="29" dur="1000"/>
+                                        <p:tgtEl>
+                                          <p:spTgt spid="9"/>
+                                        </p:tgtEl>
+                                      </p:cBhvr>
+                                    </p:animEffect>
+                                    <p:anim calcmode="lin" valueType="num">
+                                      <p:cBhvr>
+                                        <p:cTn id="30" dur="1000" fill="hold"/>
+                                        <p:tgtEl>
+                                          <p:spTgt spid="9"/>
+                                        </p:tgtEl>
+                                        <p:attrNameLst>
+                                          <p:attrName>ppt_y</p:attrName>
+                                        </p:attrNameLst>
+                                      </p:cBhvr>
+                                      <p:tavLst>
+                                        <p:tav tm="0">
+                                          <p:val>
+                                            <p:strVal val="#ppt_y+.1"/>
+                                          </p:val>
+                                        </p:tav>
+                                        <p:tav tm="100000">
+                                          <p:val>
+                                            <p:strVal val="#ppt_y"/>
+                                          </p:val>
+                                        </p:tav>
+                                      </p:tavLst>
+                                    </p:anim>
+                                  </p:childTnLst>
+                                </p:cTn>
+                              </p:par>
+                            </p:childTnLst>
+                          </p:cTn>
+                        </p:par>
+                      </p:childTnLst>
+                    </p:cTn>
+                  </p:par>
+                  <p:par>
+                    <p:cTn id="31" fill="hold">
+                      <p:stCondLst>
+                        <p:cond delay="indefinite"/>
+                      </p:stCondLst>
+                      <p:childTnLst>
+                        <p:par>
+                          <p:cTn id="32" fill="hold">
+                            <p:stCondLst>
+                              <p:cond delay="0"/>
+                            </p:stCondLst>
+                            <p:childTnLst>
+                              <p:par>
+                                <p:cTn id="33" presetID="42" presetClass="entr" presetSubtype="0" fill="hold" nodeType="clickEffect">
+                                  <p:stCondLst>
+                                    <p:cond delay="0"/>
+                                  </p:stCondLst>
+                                  <p:childTnLst>
+                                    <p:set>
+                                      <p:cBhvr>
+                                        <p:cTn id="34" dur="1" fill="hold">
+                                          <p:stCondLst>
+                                            <p:cond delay="0"/>
+                                          </p:stCondLst>
+                                        </p:cTn>
+                                        <p:tgtEl>
+                                          <p:spTgt spid="10"/>
+                                        </p:tgtEl>
+                                        <p:attrNameLst>
+                                          <p:attrName>style.visibility</p:attrName>
+                                        </p:attrNameLst>
+                                      </p:cBhvr>
+                                      <p:to>
+                                        <p:strVal val="visible"/>
+                                      </p:to>
+                                    </p:set>
+                                    <p:animEffect transition="in" filter="fade">
+                                      <p:cBhvr>
+                                        <p:cTn id="35" dur="1000"/>
+                                        <p:tgtEl>
+                                          <p:spTgt spid="10"/>
+                                        </p:tgtEl>
+                                      </p:cBhvr>
+                                    </p:animEffect>
+                                    <p:anim calcmode="lin" valueType="num">
+                                      <p:cBhvr>
+                                        <p:cTn id="36" dur="1000" fill="hold"/>
+                                        <p:tgtEl>
+                                          <p:spTgt spid="10"/>
+                                        </p:tgtEl>
+                                        <p:attrNameLst>
+                                          <p:attrName>ppt_y</p:attrName>
+                                        </p:attrNameLst>
+                                      </p:cBhvr>
+                                      <p:tavLst>
+                                        <p:tav tm="0">
+                                          <p:val>
+                                            <p:strVal val="#ppt_y+.1"/>
+                                          </p:val>
+                                        </p:tav>
+                                        <p:tav tm="100000">
+                                          <p:val>
+                                            <p:strVal val="#ppt_y"/>
+                                          </p:val>
+                                        </p:tav>
+                                      </p:tavLst>
+                                    </p:anim>
+                                  </p:childTnLst>
+                                </p:cTn>
+                              </p:par>
+                              <p:par>
+                                <p:cTn id="37" presetID="42" presetClass="entr" presetSubtype="0" fill="hold" nodeType="withEffect">
+                                  <p:stCondLst>
+                                    <p:cond delay="0"/>
+                                  </p:stCondLst>
+                                  <p:childTnLst>
+                                    <p:set>
+                                      <p:cBhvr>
+                                        <p:cTn id="38" dur="1" fill="hold">
+                                          <p:stCondLst>
+                                            <p:cond delay="0"/>
+                                          </p:stCondLst>
+                                        </p:cTn>
+                                        <p:tgtEl>
+                                          <p:spTgt spid="11"/>
+                                        </p:tgtEl>
+                                        <p:attrNameLst>
+                                          <p:attrName>style.visibility</p:attrName>
+                                        </p:attrNameLst>
+                                      </p:cBhvr>
+                                      <p:to>
+                                        <p:strVal val="visible"/>
+                                      </p:to>
+                                    </p:set>
+                                    <p:animEffect transition="in" filter="fade">
+                                      <p:cBhvr>
+                                        <p:cTn id="39" dur="1000"/>
+                                        <p:tgtEl>
+                                          <p:spTgt spid="11"/>
+                                        </p:tgtEl>
+                                      </p:cBhvr>
+                                    </p:animEffect>
+                                    <p:anim calcmode="lin" valueType="num">
+                                      <p:cBhvr>
+                                        <p:cTn id="40" dur="1000" fill="hold"/>
+                                        <p:tgtEl>
+                                          <p:spTgt spid="11"/>
+                                        </p:tgtEl>
+                                        <p:attrNameLst>
+                                          <p:attrName>ppt_y</p:attrName>
+                                        </p:attrNameLst>
+                                      </p:cBhvr>
+                                      <p:tavLst>
+                                        <p:tav tm="0">
+                                          <p:val>
+                                            <p:strVal val="#ppt_y+.1"/>
+                                          </p:val>
+                                        </p:tav>
+                                        <p:tav tm="100000">
+                                          <p:val>
+                                            <p:strVal val="#ppt_y"/>
+                                          </p:val>
+                                        </p:tav>
+                                      </p:tavLst>
+                                    </p:anim>
+                                  </p:childTnLst>
+                                </p:cTn>
+                              </p:par>
+                              <p:par>
+                                <p:cTn id="41" presetID="42" presetClass="entr" presetSubtype="0" fill="hold" nodeType="withEffect">
+                                  <p:stCondLst>
+                                    <p:cond delay="0"/>
+                                  </p:stCondLst>
+                                  <p:childTnLst>
+                                    <p:set>
+                                      <p:cBhvr>
+                                        <p:cTn id="42" dur="1" fill="hold">
+                                          <p:stCondLst>
+                                            <p:cond delay="0"/>
+                                          </p:stCondLst>
+                                        </p:cTn>
+                                        <p:tgtEl>
+                                          <p:spTgt spid="12"/>
+                                        </p:tgtEl>
+                                        <p:attrNameLst>
+                                          <p:attrName>style.visibility</p:attrName>
+                                        </p:attrNameLst>
+                                      </p:cBhvr>
+                                      <p:to>
+                                        <p:strVal val="visible"/>
+                                      </p:to>
+                                    </p:set>
+                                    <p:animEffect transition="in" filter="fade">
+                                      <p:cBhvr>
+                                        <p:cTn id="43" dur="1000"/>
+                                        <p:tgtEl>
+                                          <p:spTgt spid="12"/>
+                                        </p:tgtEl>
+                                      </p:cBhvr>
+                                    </p:animEffect>
+                                    <p:anim calcmode="lin" valueType="num">
+                                      <p:cBhvr>
+                                        <p:cTn id="44" dur="1000" fill="hold"/>
+                                        <p:tgtEl>
+                                          <p:spTgt spid="12"/>
+                                        </p:tgtEl>
+                                        <p:attrNameLst>
+                                          <p:attrName>ppt_y</p:attrName>
+                                        </p:attrNameLst>
+                                      </p:cBhvr>
+                                      <p:tavLst>
+                                        <p:tav tm="0">
+                                          <p:val>
+                                            <p:strVal val="#ppt_y+.1"/>
+                                          </p:val>
+                                        </p:tav>
+                                        <p:tav tm="100000">
+                                          <p:val>
+                                            <p:strVal val="#ppt_y"/>
+                                          </p:val>
+                                        </p:tav>
+                                      </p:tavLst>
+                                    </p:anim>
+                                  </p:childTnLst>
+                                </p:cTn>
+                              </p:par>
+                            </p:childTnLst>
+                          </p:cTn>
+                        </p:par>
+                      </p:childTnLst>
+                    </p:cTn>
+                  </p:par>
+                  <p:par>
+                    <p:cTn id="45" fill="hold">
+                      <p:stCondLst>
+                        <p:cond delay="indefinite"/>
+                      </p:stCondLst>
+                      <p:childTnLst>
+                        <p:par>
+                          <p:cTn id="46" fill="hold">
+                            <p:stCondLst>
+                              <p:cond delay="0"/>
+                            </p:stCondLst>
+                            <p:childTnLst>
+                              <p:par>
+                                <p:cTn id="47" presetID="42" presetClass="entr" presetSubtype="0" fill="hold" nodeType="clickEffect">
+                                  <p:stCondLst>
+                                    <p:cond delay="0"/>
+                                  </p:stCondLst>
+                                  <p:childTnLst>
+                                    <p:set>
+                                      <p:cBhvr>
+                                        <p:cTn id="48" dur="1" fill="hold">
+                                          <p:stCondLst>
+                                            <p:cond delay="0"/>
+                                          </p:stCondLst>
+                                        </p:cTn>
+                                        <p:tgtEl>
+                                          <p:spTgt spid="13"/>
+                                        </p:tgtEl>
+                                        <p:attrNameLst>
+                                          <p:attrName>style.visibility</p:attrName>
+                                        </p:attrNameLst>
+                                      </p:cBhvr>
+                                      <p:to>
+                                        <p:strVal val="visible"/>
+                                      </p:to>
+                                    </p:set>
+                                    <p:animEffect transition="in" filter="fade">
+                                      <p:cBhvr>
+                                        <p:cTn id="49" dur="1000"/>
+                                        <p:tgtEl>
+                                          <p:spTgt spid="13"/>
+                                        </p:tgtEl>
+                                      </p:cBhvr>
+                                    </p:animEffect>
+                                    <p:anim calcmode="lin" valueType="num">
+                                      <p:cBhvr>
+                                        <p:cTn id="50" dur="1000" fill="hold"/>
+                                        <p:tgtEl>
+                                          <p:spTgt spid="13"/>
+                                        </p:tgtEl>
+                                        <p:attrNameLst>
+                                          <p:attrName>ppt_y</p:attrName>
+                                        </p:attrNameLst>
+                                      </p:cBhvr>
+                                      <p:tavLst>
+                                        <p:tav tm="0">
+                                          <p:val>
+                                            <p:strVal val="#ppt_y+.1"/>
+                                          </p:val>
+                                        </p:tav>
+                                        <p:tav tm="100000">
+                                          <p:val>
+                                            <p:strVal val="#ppt_y"/>
+                                          </p:val>
+                                        </p:tav>
+                                      </p:tavLst>
+                                    </p:anim>
+                                  </p:childTnLst>
+                                </p:cTn>
+                              </p:par>
+                              <p:par>
+                                <p:cTn id="51" presetID="42" presetClass="entr" presetSubtype="0" fill="hold" nodeType="withEffect">
+                                  <p:stCondLst>
+                                    <p:cond delay="0"/>
+                                  </p:stCondLst>
+                                  <p:childTnLst>
+                                    <p:set>
+                                      <p:cBhvr>
+                                        <p:cTn id="52" dur="1" fill="hold">
+                                          <p:stCondLst>
+                                            <p:cond delay="0"/>
+                                          </p:stCondLst>
+                                        </p:cTn>
+                                        <p:tgtEl>
+                                          <p:spTgt spid="14"/>
+                                        </p:tgtEl>
+                                        <p:attrNameLst>
+                                          <p:attrName>style.visibility</p:attrName>
+                                        </p:attrNameLst>
+                                      </p:cBhvr>
+                                      <p:to>
+                                        <p:strVal val="visible"/>
+                                      </p:to>
+                                    </p:set>
+                                    <p:animEffect transition="in" filter="fade">
+                                      <p:cBhvr>
+                                        <p:cTn id="53" dur="1000"/>
+                                        <p:tgtEl>
+                                          <p:spTgt spid="14"/>
+                                        </p:tgtEl>
+                                      </p:cBhvr>
+                                    </p:animEffect>
+                                    <p:anim calcmode="lin" valueType="num">
+                                      <p:cBhvr>
+                                        <p:cTn id="54" dur="1000" fill="hold"/>
+                                        <p:tgtEl>
+                                          <p:spTgt spid="14"/>
+                                        </p:tgtEl>
+                                        <p:attrNameLst>
+                                          <p:attrName>ppt_y</p:attrName>
+                                        </p:attrNameLst>
+                                      </p:cBhvr>
+                                      <p:tavLst>
+                                        <p:tav tm="0">
+                                          <p:val>
+                                            <p:strVal val="#ppt_y+.1"/>
+                                          </p:val>
+                                        </p:tav>
+                                        <p:tav tm="100000">
+                                          <p:val>
+                                            <p:strVal val="#ppt_y"/>
+                                          </p:val>
+                                        </p:tav>
+                                      </p:tavLst>
+                                    </p:anim>
+                                  </p:childTnLst>
+                                </p:cTn>
+                              </p:par>
+                              <p:par>
+                                <p:cTn id="55" presetID="42" presetClass="entr" presetSubtype="0" fill="hold" nodeType="withEffect">
+                                  <p:stCondLst>
+                                    <p:cond delay="0"/>
+                                  </p:stCondLst>
+                                  <p:childTnLst>
+                                    <p:set>
+                                      <p:cBhvr>
+                                        <p:cTn id="56" dur="1" fill="hold">
+                                          <p:stCondLst>
+                                            <p:cond delay="0"/>
+                                          </p:stCondLst>
+                                        </p:cTn>
+                                        <p:tgtEl>
+                                          <p:spTgt spid="15"/>
+                                        </p:tgtEl>
+                                        <p:attrNameLst>
+                                          <p:attrName>style.visibility</p:attrName>
+                                        </p:attrNameLst>
+                                      </p:cBhvr>
+                                      <p:to>
+                                        <p:strVal val="visible"/>
+                                      </p:to>
+                                    </p:set>
+                                    <p:animEffect transition="in" filter="fade">
+                                      <p:cBhvr>
+                                        <p:cTn id="57" dur="1000"/>
+                                        <p:tgtEl>
+                                          <p:spTgt spid="15"/>
+                                        </p:tgtEl>
+                                      </p:cBhvr>
+                                    </p:animEffect>
+                                    <p:anim calcmode="lin" valueType="num">
+                                      <p:cBhvr>
+                                        <p:cTn id="58" dur="1000" fill="hold"/>
+                                        <p:tgtEl>
+                                          <p:spTgt spid="15"/>
+                                        </p:tgtEl>
+                                        <p:attrNameLst>
+                                          <p:attrName>ppt_y</p:attrName>
+                                        </p:attrNameLst>
+                                      </p:cBhvr>
+                                      <p:tavLst>
+                                        <p:tav tm="0">
+                                          <p:val>
+                                            <p:strVal val="#ppt_y+.1"/>
+                                          </p:val>
+                                        </p:tav>
+                                        <p:tav tm="100000">
+                                          <p:val>
+                                            <p:strVal val="#ppt_y"/>
+                                          </p:val>
+                                        </p:tav>
+                                      </p:tavLst>
+                                    </p:anim>
+                                  </p:childTnLst>
+                                </p:cTn>
+                              </p:par>
+                            </p:childTnLst>
+                          </p:cTn>
+                        </p:par>
+                      </p:childTnLst>
+                    </p:cTn>
+                  </p:par>
+                </p:childTnLst>
+              </p:cTn>
+              <p:prevCondLst>
+                <p:cond evt="onPrev" delay="0">
+                  <p:tgtEl>
+                    <p:sldTgt/>
+                  </p:tgtEl>
+                </p:cond>
+              </p:prevCondLst>
+              <p:nextCondLst>
+                <p:cond evt="onNext" delay="0">
+                  <p:tgtEl>
+                    <p:sldTgt/>
+                  </p:tgtEl>
+                </p:cond>
+              </p:nextCondLst>
+            </p:seq>
+          </p:childTnLst>
+        </p:cTn>
+      </p:par>
+    </p:tnLst>
+  </p:timing>
 </p:sld>
 </file>
 
